--- a/preview_v7/cn/l-cn-bs-u7-1.pptx
+++ b/preview_v7/cn/l-cn-bs-u7-1.pptx
@@ -3142,61 +3142,20 @@
       </p:sp>
       <p:sp>
         <p:nvSpPr>
-          <p:cNvPr id="3" name="TextBox 2"/>
-          <p:cNvSpPr txBox="1"/>
-          <p:nvPr/>
-        </p:nvSpPr>
-        <p:spPr>
-          <a:xfrm>
-            <a:off x="640080" y="640080"/>
-            <a:ext cx="10911535" cy="502920"/>
-          </a:xfrm>
-          <a:prstGeom prst="rect">
-            <a:avLst/>
-          </a:prstGeom>
-          <a:noFill/>
-        </p:spPr>
-        <p:txBody>
-          <a:bodyPr wrap="square" anchor="t" lIns="0" rIns="0" tIns="0" bIns="0">
-            <a:spAutoFit/>
-          </a:bodyPr>
-          <a:lstStyle/>
-          <a:p>
-            <a:pPr algn="l">
-              <a:spcAft>
-                <a:spcPts val="0"/>
-              </a:spcAft>
-            </a:pPr>
-            <a:r>
-              <a:rPr sz="1200" b="1">
-                <a:solidFill>
-                  <a:srgbClr val="B23A2A"/>
-                </a:solidFill>
-                <a:latin typeface="微软雅黑"/>
-                <a:ea typeface="微软雅黑"/>
-                <a:cs typeface="微软雅黑"/>
-              </a:rPr>
-              <a:t>语文 · 必修上册 · 第7单元 自然情怀</a:t>
-            </a:r>
-          </a:p>
-        </p:txBody>
-      </p:sp>
-      <p:sp>
-        <p:nvSpPr>
-          <p:cNvPr id="4" name="Rectangle 3"/>
+          <p:cNvPr id="3" name="Rectangle 2"/>
           <p:cNvSpPr/>
           <p:nvPr/>
         </p:nvSpPr>
         <p:spPr>
           <a:xfrm>
-            <a:off x="640080" y="1207008"/>
-            <a:ext cx="822960" cy="30480"/>
+            <a:off x="0" y="0"/>
+            <a:ext cx="12191695" cy="2514600"/>
           </a:xfrm>
           <a:prstGeom prst="rect">
             <a:avLst/>
           </a:prstGeom>
           <a:solidFill>
-            <a:srgbClr val="B23A2A"/>
+            <a:srgbClr val="1C2A33"/>
           </a:solidFill>
           <a:ln>
             <a:noFill/>
@@ -3227,92 +3186,14 @@
       </p:sp>
       <p:sp>
         <p:nvSpPr>
-          <p:cNvPr id="5" name="TextBox 4"/>
-          <p:cNvSpPr txBox="1"/>
-          <p:nvPr/>
-        </p:nvSpPr>
-        <p:spPr>
-          <a:xfrm>
-            <a:off x="640080" y="1737360"/>
-            <a:ext cx="10911535" cy="2011680"/>
-          </a:xfrm>
-          <a:prstGeom prst="rect">
-            <a:avLst/>
-          </a:prstGeom>
-          <a:noFill/>
-        </p:spPr>
-        <p:txBody>
-          <a:bodyPr wrap="square" anchor="t" lIns="0" rIns="0" tIns="0" bIns="0">
-            <a:spAutoFit/>
-          </a:bodyPr>
-          <a:lstStyle/>
-          <a:p>
-            <a:pPr algn="l">
-              <a:lnSpc>
-                <a:spcPct val="115000"/>
-              </a:lnSpc>
-            </a:pPr>
-            <a:r>
-              <a:rPr sz="4000" b="1">
-                <a:solidFill>
-                  <a:srgbClr val="1C2A33"/>
-                </a:solidFill>
-                <a:latin typeface="楷体"/>
-                <a:ea typeface="楷体"/>
-                <a:cs typeface="楷体"/>
-              </a:rPr>
-              <a:t>故都的秋 精读——清静悲凉的秋味与形散神聚</a:t>
-            </a:r>
-          </a:p>
-        </p:txBody>
-      </p:sp>
-      <p:sp>
-        <p:nvSpPr>
-          <p:cNvPr id="6" name="TextBox 5"/>
-          <p:cNvSpPr txBox="1"/>
-          <p:nvPr/>
-        </p:nvSpPr>
-        <p:spPr>
-          <a:xfrm>
-            <a:off x="640080" y="3840480"/>
-            <a:ext cx="10911535" cy="457200"/>
-          </a:xfrm>
-          <a:prstGeom prst="rect">
-            <a:avLst/>
-          </a:prstGeom>
-          <a:noFill/>
-        </p:spPr>
-        <p:txBody>
-          <a:bodyPr wrap="square" anchor="t" lIns="0" rIns="0" tIns="0" bIns="0">
-            <a:spAutoFit/>
-          </a:bodyPr>
-          <a:lstStyle/>
-          <a:p>
-            <a:pPr algn="l"/>
-            <a:r>
-              <a:rPr sz="1700" b="1">
-                <a:solidFill>
-                  <a:srgbClr val="B23A2A"/>
-                </a:solidFill>
-                <a:latin typeface="微软雅黑"/>
-                <a:ea typeface="微软雅黑"/>
-                <a:cs typeface="微软雅黑"/>
-              </a:rPr>
-              <a:t>课文精读  ·  第1课时  ·  45分钟</a:t>
-            </a:r>
-          </a:p>
-        </p:txBody>
-      </p:sp>
-      <p:sp>
-        <p:nvSpPr>
-          <p:cNvPr id="7" name="Rectangle 6"/>
+          <p:cNvPr id="4" name="Rectangle 3"/>
           <p:cNvSpPr/>
           <p:nvPr/>
         </p:nvSpPr>
         <p:spPr>
           <a:xfrm>
-            <a:off x="640080" y="5394960"/>
-            <a:ext cx="2011680" cy="33020"/>
+            <a:off x="640080" y="502920"/>
+            <a:ext cx="822960" cy="38100"/>
           </a:xfrm>
           <a:prstGeom prst="rect">
             <a:avLst/>
@@ -3349,14 +3230,14 @@
       </p:sp>
       <p:sp>
         <p:nvSpPr>
-          <p:cNvPr id="8" name="TextBox 7"/>
+          <p:cNvPr id="5" name="TextBox 4"/>
           <p:cNvSpPr txBox="1"/>
           <p:nvPr/>
         </p:nvSpPr>
         <p:spPr>
           <a:xfrm>
-            <a:off x="640080" y="5623560"/>
-            <a:ext cx="10911535" cy="548640"/>
+            <a:off x="640080" y="658368"/>
+            <a:ext cx="10515600" cy="411480"/>
           </a:xfrm>
           <a:prstGeom prst="rect">
             <a:avLst/>
@@ -3371,15 +3252,134 @@
           <a:p>
             <a:pPr algn="l"/>
             <a:r>
-              <a:rPr sz="1400" b="0">
-                <a:solidFill>
-                  <a:srgbClr val="6B6258"/>
+              <a:rPr sz="1400" b="1">
+                <a:solidFill>
+                  <a:srgbClr val="C8A86B"/>
                 </a:solidFill>
                 <a:latin typeface="微软雅黑"/>
                 <a:ea typeface="微软雅黑"/>
                 <a:cs typeface="微软雅黑"/>
               </a:rPr>
-              <a:t>学习任务群：文学阅读与写作    |    年级：高一</a:t>
+              <a:t>必修上 · 第七单元 · 自然情怀 · 第一课时</a:t>
+            </a:r>
+          </a:p>
+        </p:txBody>
+      </p:sp>
+      <p:sp>
+        <p:nvSpPr>
+          <p:cNvPr id="6" name="TextBox 5"/>
+          <p:cNvSpPr txBox="1"/>
+          <p:nvPr/>
+        </p:nvSpPr>
+        <p:spPr>
+          <a:xfrm>
+            <a:off x="640080" y="1143000"/>
+            <a:ext cx="11247120" cy="1188720"/>
+          </a:xfrm>
+          <a:prstGeom prst="rect">
+            <a:avLst/>
+          </a:prstGeom>
+          <a:noFill/>
+        </p:spPr>
+        <p:txBody>
+          <a:bodyPr wrap="square" anchor="t" lIns="0" rIns="0" tIns="0" bIns="0">
+            <a:spAutoFit/>
+          </a:bodyPr>
+          <a:lstStyle/>
+          <a:p>
+            <a:pPr algn="l">
+              <a:lnSpc>
+                <a:spcPct val="115000"/>
+              </a:lnSpc>
+            </a:pPr>
+            <a:r>
+              <a:rPr sz="3600" b="1">
+                <a:solidFill>
+                  <a:srgbClr val="FFFFFF"/>
+                </a:solidFill>
+                <a:latin typeface="楷体"/>
+                <a:ea typeface="楷体"/>
+                <a:cs typeface="楷体"/>
+              </a:rPr>
+              <a:t>故都的秋 精读——清静悲凉的秋味与形散神聚</a:t>
+            </a:r>
+          </a:p>
+        </p:txBody>
+      </p:sp>
+      <p:sp>
+        <p:nvSpPr>
+          <p:cNvPr id="7" name="TextBox 6"/>
+          <p:cNvSpPr txBox="1"/>
+          <p:nvPr/>
+        </p:nvSpPr>
+        <p:spPr>
+          <a:xfrm>
+            <a:off x="640080" y="2788920"/>
+            <a:ext cx="10911535" cy="1097280"/>
+          </a:xfrm>
+          <a:prstGeom prst="rect">
+            <a:avLst/>
+          </a:prstGeom>
+          <a:noFill/>
+        </p:spPr>
+        <p:txBody>
+          <a:bodyPr wrap="square" anchor="t" lIns="0" rIns="0" tIns="0" bIns="0">
+            <a:spAutoFit/>
+          </a:bodyPr>
+          <a:lstStyle/>
+          <a:p>
+            <a:pPr algn="l">
+              <a:lnSpc>
+                <a:spcPct val="150000"/>
+              </a:lnSpc>
+            </a:pPr>
+            <a:r>
+              <a:rPr sz="1700" b="0">
+                <a:solidFill>
+                  <a:srgbClr val="1C2A33"/>
+                </a:solidFill>
+                <a:latin typeface="楷体"/>
+                <a:ea typeface="楷体"/>
+                <a:cs typeface="楷体"/>
+              </a:rPr>
+              <a:t>郁达夫写北国之秋：「清、静、悲凉」。五幅寻常小景，神却都聚在这三个字上。读散文，先找那个「聚」的眼。</a:t>
+            </a:r>
+          </a:p>
+        </p:txBody>
+      </p:sp>
+      <p:sp>
+        <p:nvSpPr>
+          <p:cNvPr id="8" name="TextBox 7"/>
+          <p:cNvSpPr txBox="1"/>
+          <p:nvPr/>
+        </p:nvSpPr>
+        <p:spPr>
+          <a:xfrm>
+            <a:off x="640080" y="5989320"/>
+            <a:ext cx="10911535" cy="365760"/>
+          </a:xfrm>
+          <a:prstGeom prst="rect">
+            <a:avLst/>
+          </a:prstGeom>
+          <a:noFill/>
+        </p:spPr>
+        <p:txBody>
+          <a:bodyPr wrap="square" anchor="t" lIns="0" rIns="0" tIns="0" bIns="0">
+            <a:spAutoFit/>
+          </a:bodyPr>
+          <a:lstStyle/>
+          <a:p>
+            <a:pPr algn="l"/>
+            <a:r>
+              <a:rPr sz="1100" b="0">
+                <a:solidFill>
+                  <a:srgbClr val="6B6258"/>
+                </a:solidFill>
+                <a:latin typeface="微软雅黑"/>
+                <a:ea typeface="微软雅黑"/>
+                <a:cs typeface="微软雅黑"/>
+              </a:rPr>
+              <a:t>本课件未使用无关配图 · 学科色块设计</a:t>
             </a:r>
           </a:p>
         </p:txBody>
@@ -3519,7 +3519,7 @@
                 <a:ea typeface="微软雅黑"/>
                 <a:cs typeface="微软雅黑"/>
               </a:rPr>
-              <a:t>学习目标</a:t>
+              <a:t>本课目标</a:t>
             </a:r>
           </a:p>
         </p:txBody>
@@ -3570,14 +3570,51 @@
       </p:sp>
       <p:sp>
         <p:nvSpPr>
-          <p:cNvPr id="5" name="Rounded Rectangle 4"/>
+          <p:cNvPr id="5" name="TextBox 4"/>
+          <p:cNvSpPr txBox="1"/>
+          <p:nvPr/>
+        </p:nvSpPr>
+        <p:spPr>
+          <a:xfrm>
+            <a:off x="640080" y="1280160"/>
+            <a:ext cx="10058400" cy="548640"/>
+          </a:xfrm>
+          <a:prstGeom prst="rect">
+            <a:avLst/>
+          </a:prstGeom>
+          <a:noFill/>
+        </p:spPr>
+        <p:txBody>
+          <a:bodyPr wrap="square" anchor="t" lIns="0" rIns="0" tIns="0" bIns="0">
+            <a:spAutoFit/>
+          </a:bodyPr>
+          <a:lstStyle/>
+          <a:p>
+            <a:pPr algn="l"/>
+            <a:r>
+              <a:rPr sz="3000" b="1">
+                <a:solidFill>
+                  <a:srgbClr val="1C2A33"/>
+                </a:solidFill>
+                <a:latin typeface="楷体"/>
+                <a:ea typeface="楷体"/>
+                <a:cs typeface="楷体"/>
+              </a:rPr>
+              <a:t>学习目标</a:t>
+            </a:r>
+          </a:p>
+        </p:txBody>
+      </p:sp>
+      <p:sp>
+        <p:nvSpPr>
+          <p:cNvPr id="6" name="Rounded Rectangle 5"/>
           <p:cNvSpPr/>
           <p:nvPr/>
         </p:nvSpPr>
         <p:spPr>
           <a:xfrm>
-            <a:off x="640080" y="1417320"/>
-            <a:ext cx="5349240" cy="2057400"/>
+            <a:off x="640080" y="2194560"/>
+            <a:ext cx="5272887" cy="2057400"/>
           </a:xfrm>
           <a:prstGeom prst="roundRect">
             <a:avLst/>
@@ -3585,7 +3622,7 @@
           <a:solidFill>
             <a:srgbClr val="FFFFFF"/>
           </a:solidFill>
-          <a:ln w="22860">
+          <a:ln w="20320">
             <a:solidFill>
               <a:srgbClr val="B23A2A"/>
             </a:solidFill>
@@ -3616,16 +3653,16 @@
       </p:sp>
       <p:sp>
         <p:nvSpPr>
-          <p:cNvPr id="6" name="Oval 5"/>
+          <p:cNvPr id="7" name="Rectangle 6"/>
           <p:cNvSpPr/>
           <p:nvPr/>
         </p:nvSpPr>
         <p:spPr>
           <a:xfrm>
-            <a:off x="804672" y="1581912"/>
-            <a:ext cx="457200" cy="457200"/>
-          </a:xfrm>
-          <a:prstGeom prst="ellipse">
+            <a:off x="640080" y="2194560"/>
+            <a:ext cx="5272887" cy="502920"/>
+          </a:xfrm>
+          <a:prstGeom prst="rect">
             <a:avLst/>
           </a:prstGeom>
           <a:solidFill>
@@ -3660,14 +3697,14 @@
       </p:sp>
       <p:sp>
         <p:nvSpPr>
-          <p:cNvPr id="7" name="TextBox 6"/>
+          <p:cNvPr id="8" name="TextBox 7"/>
           <p:cNvSpPr txBox="1"/>
           <p:nvPr/>
         </p:nvSpPr>
         <p:spPr>
           <a:xfrm>
-            <a:off x="804672" y="1636776"/>
-            <a:ext cx="457200" cy="384048"/>
+            <a:off x="640080" y="2286000"/>
+            <a:ext cx="5272887" cy="365760"/>
           </a:xfrm>
           <a:prstGeom prst="rect">
             <a:avLst/>
@@ -3682,7 +3719,7 @@
           <a:p>
             <a:pPr algn="ctr"/>
             <a:r>
-              <a:rPr sz="1600" b="1">
+              <a:rPr sz="1500" b="1">
                 <a:solidFill>
                   <a:srgbClr val="FFFFFF"/>
                 </a:solidFill>
@@ -3690,21 +3727,21 @@
                 <a:ea typeface="微软雅黑"/>
                 <a:cs typeface="微软雅黑"/>
               </a:rPr>
-              <a:t>1</a:t>
-            </a:r>
-          </a:p>
-        </p:txBody>
-      </p:sp>
-      <p:sp>
-        <p:nvSpPr>
-          <p:cNvPr id="8" name="TextBox 7"/>
+              <a:t>语言能力</a:t>
+            </a:r>
+          </a:p>
+        </p:txBody>
+      </p:sp>
+      <p:sp>
+        <p:nvSpPr>
+          <p:cNvPr id="9" name="TextBox 8"/>
           <p:cNvSpPr txBox="1"/>
           <p:nvPr/>
         </p:nvSpPr>
         <p:spPr>
           <a:xfrm>
-            <a:off x="1371600" y="1527048"/>
-            <a:ext cx="4434840" cy="457200"/>
+            <a:off x="914400" y="2852928"/>
+            <a:ext cx="4724247" cy="1280160"/>
           </a:xfrm>
           <a:prstGeom prst="rect">
             <a:avLst/>
@@ -3719,52 +3756,11 @@
           <a:p>
             <a:pPr algn="l">
               <a:lnSpc>
-                <a:spcPct val="110000"/>
+                <a:spcPct val="145000"/>
               </a:lnSpc>
             </a:pPr>
             <a:r>
-              <a:rPr sz="1600" b="1">
-                <a:solidFill>
-                  <a:srgbClr val="1C2A33"/>
-                </a:solidFill>
-                <a:latin typeface="微软雅黑"/>
-                <a:ea typeface="微软雅黑"/>
-                <a:cs typeface="微软雅黑"/>
-              </a:rPr>
-              <a:t>目标</a:t>
-            </a:r>
-          </a:p>
-        </p:txBody>
-      </p:sp>
-      <p:sp>
-        <p:nvSpPr>
-          <p:cNvPr id="9" name="TextBox 8"/>
-          <p:cNvSpPr txBox="1"/>
-          <p:nvPr/>
-        </p:nvSpPr>
-        <p:spPr>
-          <a:xfrm>
-            <a:off x="1371600" y="1965960"/>
-            <a:ext cx="4434840" cy="1417320"/>
-          </a:xfrm>
-          <a:prstGeom prst="rect">
-            <a:avLst/>
-          </a:prstGeom>
-          <a:noFill/>
-        </p:spPr>
-        <p:txBody>
-          <a:bodyPr wrap="square" anchor="t" lIns="0" rIns="0" tIns="0" bIns="0">
-            <a:spAutoFit/>
-          </a:bodyPr>
-          <a:lstStyle/>
-          <a:p>
-            <a:pPr algn="l">
-              <a:lnSpc>
-                <a:spcPct val="128000"/>
-              </a:lnSpc>
-            </a:pPr>
-            <a:r>
-              <a:rPr sz="1400" b="0">
+              <a:rPr sz="1350" b="0">
                 <a:solidFill>
                   <a:srgbClr val="1C2A33"/>
                 </a:solidFill>
@@ -3785,8 +3781,8 @@
         </p:nvSpPr>
         <p:spPr>
           <a:xfrm>
-            <a:off x="6263640" y="1417320"/>
-            <a:ext cx="5349240" cy="2057400"/>
+            <a:off x="6278727" y="2194560"/>
+            <a:ext cx="5272887" cy="2057400"/>
           </a:xfrm>
           <a:prstGeom prst="roundRect">
             <a:avLst/>
@@ -3794,9 +3790,9 @@
           <a:solidFill>
             <a:srgbClr val="FFFFFF"/>
           </a:solidFill>
-          <a:ln w="22860">
+          <a:ln w="20320">
             <a:solidFill>
-              <a:srgbClr val="B23A2A"/>
+              <a:srgbClr val="2E7D6B"/>
             </a:solidFill>
           </a:ln>
           <a:effectLst/>
@@ -3825,20 +3821,20 @@
       </p:sp>
       <p:sp>
         <p:nvSpPr>
-          <p:cNvPr id="11" name="Oval 10"/>
+          <p:cNvPr id="11" name="Rectangle 10"/>
           <p:cNvSpPr/>
           <p:nvPr/>
         </p:nvSpPr>
         <p:spPr>
           <a:xfrm>
-            <a:off x="6428232" y="1581912"/>
-            <a:ext cx="457200" cy="457200"/>
-          </a:xfrm>
-          <a:prstGeom prst="ellipse">
+            <a:off x="6278727" y="2194560"/>
+            <a:ext cx="5272887" cy="502920"/>
+          </a:xfrm>
+          <a:prstGeom prst="rect">
             <a:avLst/>
           </a:prstGeom>
           <a:solidFill>
-            <a:srgbClr val="B23A2A"/>
+            <a:srgbClr val="2E7D6B"/>
           </a:solidFill>
           <a:ln>
             <a:noFill/>
@@ -3875,8 +3871,8 @@
         </p:nvSpPr>
         <p:spPr>
           <a:xfrm>
-            <a:off x="6428232" y="1636776"/>
-            <a:ext cx="457200" cy="384048"/>
+            <a:off x="6278727" y="2286000"/>
+            <a:ext cx="5272887" cy="365760"/>
           </a:xfrm>
           <a:prstGeom prst="rect">
             <a:avLst/>
@@ -3891,7 +3887,7 @@
           <a:p>
             <a:pPr algn="ctr"/>
             <a:r>
-              <a:rPr sz="1600" b="1">
+              <a:rPr sz="1500" b="1">
                 <a:solidFill>
                   <a:srgbClr val="FFFFFF"/>
                 </a:solidFill>
@@ -3899,7 +3895,7 @@
                 <a:ea typeface="微软雅黑"/>
                 <a:cs typeface="微软雅黑"/>
               </a:rPr>
-              <a:t>2</a:t>
+              <a:t>文化意识</a:t>
             </a:r>
           </a:p>
         </p:txBody>
@@ -3912,8 +3908,8 @@
         </p:nvSpPr>
         <p:spPr>
           <a:xfrm>
-            <a:off x="6995160" y="1527048"/>
-            <a:ext cx="4434840" cy="457200"/>
+            <a:off x="6553047" y="2852928"/>
+            <a:ext cx="4724247" cy="1280160"/>
           </a:xfrm>
           <a:prstGeom prst="rect">
             <a:avLst/>
@@ -3928,52 +3924,11 @@
           <a:p>
             <a:pPr algn="l">
               <a:lnSpc>
-                <a:spcPct val="110000"/>
+                <a:spcPct val="145000"/>
               </a:lnSpc>
             </a:pPr>
             <a:r>
-              <a:rPr sz="1600" b="1">
-                <a:solidFill>
-                  <a:srgbClr val="1C2A33"/>
-                </a:solidFill>
-                <a:latin typeface="微软雅黑"/>
-                <a:ea typeface="微软雅黑"/>
-                <a:cs typeface="微软雅黑"/>
-              </a:rPr>
-              <a:t>目标</a:t>
-            </a:r>
-          </a:p>
-        </p:txBody>
-      </p:sp>
-      <p:sp>
-        <p:nvSpPr>
-          <p:cNvPr id="14" name="TextBox 13"/>
-          <p:cNvSpPr txBox="1"/>
-          <p:nvPr/>
-        </p:nvSpPr>
-        <p:spPr>
-          <a:xfrm>
-            <a:off x="6995160" y="1965960"/>
-            <a:ext cx="4434840" cy="1417320"/>
-          </a:xfrm>
-          <a:prstGeom prst="rect">
-            <a:avLst/>
-          </a:prstGeom>
-          <a:noFill/>
-        </p:spPr>
-        <p:txBody>
-          <a:bodyPr wrap="square" anchor="t" lIns="0" rIns="0" tIns="0" bIns="0">
-            <a:spAutoFit/>
-          </a:bodyPr>
-          <a:lstStyle/>
-          <a:p>
-            <a:pPr algn="l">
-              <a:lnSpc>
-                <a:spcPct val="128000"/>
-              </a:lnSpc>
-            </a:pPr>
-            <a:r>
-              <a:rPr sz="1400" b="0">
+              <a:rPr sz="1350" b="0">
                 <a:solidFill>
                   <a:srgbClr val="1C2A33"/>
                 </a:solidFill>
@@ -3988,14 +3943,14 @@
       </p:sp>
       <p:sp>
         <p:nvSpPr>
-          <p:cNvPr id="15" name="Rounded Rectangle 14"/>
+          <p:cNvPr id="14" name="Rounded Rectangle 13"/>
           <p:cNvSpPr/>
           <p:nvPr/>
         </p:nvSpPr>
         <p:spPr>
           <a:xfrm>
-            <a:off x="640080" y="3703320"/>
-            <a:ext cx="5349240" cy="2057400"/>
+            <a:off x="640080" y="4617720"/>
+            <a:ext cx="5272887" cy="2057400"/>
           </a:xfrm>
           <a:prstGeom prst="roundRect">
             <a:avLst/>
@@ -4003,9 +3958,9 @@
           <a:solidFill>
             <a:srgbClr val="FFFFFF"/>
           </a:solidFill>
-          <a:ln w="22860">
+          <a:ln w="20320">
             <a:solidFill>
-              <a:srgbClr val="B23A2A"/>
+              <a:srgbClr val="C8A86B"/>
             </a:solidFill>
           </a:ln>
           <a:effectLst/>
@@ -4034,20 +3989,20 @@
       </p:sp>
       <p:sp>
         <p:nvSpPr>
-          <p:cNvPr id="16" name="Oval 15"/>
+          <p:cNvPr id="15" name="Rectangle 14"/>
           <p:cNvSpPr/>
           <p:nvPr/>
         </p:nvSpPr>
         <p:spPr>
           <a:xfrm>
-            <a:off x="804672" y="3867912"/>
-            <a:ext cx="457200" cy="457200"/>
-          </a:xfrm>
-          <a:prstGeom prst="ellipse">
+            <a:off x="640080" y="4617720"/>
+            <a:ext cx="5272887" cy="502920"/>
+          </a:xfrm>
+          <a:prstGeom prst="rect">
             <a:avLst/>
           </a:prstGeom>
           <a:solidFill>
-            <a:srgbClr val="B23A2A"/>
+            <a:srgbClr val="C8A86B"/>
           </a:solidFill>
           <a:ln>
             <a:noFill/>
@@ -4078,14 +4033,14 @@
       </p:sp>
       <p:sp>
         <p:nvSpPr>
-          <p:cNvPr id="17" name="TextBox 16"/>
+          <p:cNvPr id="16" name="TextBox 15"/>
           <p:cNvSpPr txBox="1"/>
           <p:nvPr/>
         </p:nvSpPr>
         <p:spPr>
           <a:xfrm>
-            <a:off x="804672" y="3922776"/>
-            <a:ext cx="457200" cy="384048"/>
+            <a:off x="640080" y="4709160"/>
+            <a:ext cx="5272887" cy="365760"/>
           </a:xfrm>
           <a:prstGeom prst="rect">
             <a:avLst/>
@@ -4100,7 +4055,7 @@
           <a:p>
             <a:pPr algn="ctr"/>
             <a:r>
-              <a:rPr sz="1600" b="1">
+              <a:rPr sz="1500" b="1">
                 <a:solidFill>
                   <a:srgbClr val="FFFFFF"/>
                 </a:solidFill>
@@ -4108,21 +4063,21 @@
                 <a:ea typeface="微软雅黑"/>
                 <a:cs typeface="微软雅黑"/>
               </a:rPr>
-              <a:t>3</a:t>
-            </a:r>
-          </a:p>
-        </p:txBody>
-      </p:sp>
-      <p:sp>
-        <p:nvSpPr>
-          <p:cNvPr id="18" name="TextBox 17"/>
+              <a:t>思维品质</a:t>
+            </a:r>
+          </a:p>
+        </p:txBody>
+      </p:sp>
+      <p:sp>
+        <p:nvSpPr>
+          <p:cNvPr id="17" name="TextBox 16"/>
           <p:cNvSpPr txBox="1"/>
           <p:nvPr/>
         </p:nvSpPr>
         <p:spPr>
           <a:xfrm>
-            <a:off x="1371600" y="3813048"/>
-            <a:ext cx="4434840" cy="457200"/>
+            <a:off x="914400" y="5276088"/>
+            <a:ext cx="4724247" cy="1280160"/>
           </a:xfrm>
           <a:prstGeom prst="rect">
             <a:avLst/>
@@ -4137,52 +4092,11 @@
           <a:p>
             <a:pPr algn="l">
               <a:lnSpc>
-                <a:spcPct val="110000"/>
+                <a:spcPct val="145000"/>
               </a:lnSpc>
             </a:pPr>
             <a:r>
-              <a:rPr sz="1600" b="1">
-                <a:solidFill>
-                  <a:srgbClr val="1C2A33"/>
-                </a:solidFill>
-                <a:latin typeface="微软雅黑"/>
-                <a:ea typeface="微软雅黑"/>
-                <a:cs typeface="微软雅黑"/>
-              </a:rPr>
-              <a:t>目标</a:t>
-            </a:r>
-          </a:p>
-        </p:txBody>
-      </p:sp>
-      <p:sp>
-        <p:nvSpPr>
-          <p:cNvPr id="19" name="TextBox 18"/>
-          <p:cNvSpPr txBox="1"/>
-          <p:nvPr/>
-        </p:nvSpPr>
-        <p:spPr>
-          <a:xfrm>
-            <a:off x="1371600" y="4251960"/>
-            <a:ext cx="4434840" cy="1417320"/>
-          </a:xfrm>
-          <a:prstGeom prst="rect">
-            <a:avLst/>
-          </a:prstGeom>
-          <a:noFill/>
-        </p:spPr>
-        <p:txBody>
-          <a:bodyPr wrap="square" anchor="t" lIns="0" rIns="0" tIns="0" bIns="0">
-            <a:spAutoFit/>
-          </a:bodyPr>
-          <a:lstStyle/>
-          <a:p>
-            <a:pPr algn="l">
-              <a:lnSpc>
-                <a:spcPct val="128000"/>
-              </a:lnSpc>
-            </a:pPr>
-            <a:r>
-              <a:rPr sz="1400" b="0">
+              <a:rPr sz="1350" b="0">
                 <a:solidFill>
                   <a:srgbClr val="1C2A33"/>
                 </a:solidFill>
@@ -4197,14 +4111,14 @@
       </p:sp>
       <p:sp>
         <p:nvSpPr>
-          <p:cNvPr id="20" name="Rounded Rectangle 19"/>
+          <p:cNvPr id="18" name="Rounded Rectangle 17"/>
           <p:cNvSpPr/>
           <p:nvPr/>
         </p:nvSpPr>
         <p:spPr>
           <a:xfrm>
-            <a:off x="6263640" y="3703320"/>
-            <a:ext cx="5349240" cy="2057400"/>
+            <a:off x="6278727" y="4617720"/>
+            <a:ext cx="5272887" cy="2057400"/>
           </a:xfrm>
           <a:prstGeom prst="roundRect">
             <a:avLst/>
@@ -4212,9 +4126,9 @@
           <a:solidFill>
             <a:srgbClr val="FFFFFF"/>
           </a:solidFill>
-          <a:ln w="22860">
+          <a:ln w="20320">
             <a:solidFill>
-              <a:srgbClr val="B23A2A"/>
+              <a:srgbClr val="6B6258"/>
             </a:solidFill>
           </a:ln>
           <a:effectLst/>
@@ -4243,20 +4157,20 @@
       </p:sp>
       <p:sp>
         <p:nvSpPr>
-          <p:cNvPr id="21" name="Oval 20"/>
+          <p:cNvPr id="19" name="Rectangle 18"/>
           <p:cNvSpPr/>
           <p:nvPr/>
         </p:nvSpPr>
         <p:spPr>
           <a:xfrm>
-            <a:off x="6428232" y="3867912"/>
-            <a:ext cx="457200" cy="457200"/>
-          </a:xfrm>
-          <a:prstGeom prst="ellipse">
+            <a:off x="6278727" y="4617720"/>
+            <a:ext cx="5272887" cy="502920"/>
+          </a:xfrm>
+          <a:prstGeom prst="rect">
             <a:avLst/>
           </a:prstGeom>
           <a:solidFill>
-            <a:srgbClr val="B23A2A"/>
+            <a:srgbClr val="6B6258"/>
           </a:solidFill>
           <a:ln>
             <a:noFill/>
@@ -4287,14 +4201,14 @@
       </p:sp>
       <p:sp>
         <p:nvSpPr>
-          <p:cNvPr id="22" name="TextBox 21"/>
+          <p:cNvPr id="20" name="TextBox 19"/>
           <p:cNvSpPr txBox="1"/>
           <p:nvPr/>
         </p:nvSpPr>
         <p:spPr>
           <a:xfrm>
-            <a:off x="6428232" y="3922776"/>
-            <a:ext cx="457200" cy="384048"/>
+            <a:off x="6278727" y="4709160"/>
+            <a:ext cx="5272887" cy="365760"/>
           </a:xfrm>
           <a:prstGeom prst="rect">
             <a:avLst/>
@@ -4309,7 +4223,7 @@
           <a:p>
             <a:pPr algn="ctr"/>
             <a:r>
-              <a:rPr sz="1600" b="1">
+              <a:rPr sz="1500" b="1">
                 <a:solidFill>
                   <a:srgbClr val="FFFFFF"/>
                 </a:solidFill>
@@ -4317,21 +4231,21 @@
                 <a:ea typeface="微软雅黑"/>
                 <a:cs typeface="微软雅黑"/>
               </a:rPr>
-              <a:t>4</a:t>
-            </a:r>
-          </a:p>
-        </p:txBody>
-      </p:sp>
-      <p:sp>
-        <p:nvSpPr>
-          <p:cNvPr id="23" name="TextBox 22"/>
+              <a:t>学习能力</a:t>
+            </a:r>
+          </a:p>
+        </p:txBody>
+      </p:sp>
+      <p:sp>
+        <p:nvSpPr>
+          <p:cNvPr id="21" name="TextBox 20"/>
           <p:cNvSpPr txBox="1"/>
           <p:nvPr/>
         </p:nvSpPr>
         <p:spPr>
           <a:xfrm>
-            <a:off x="6995160" y="3813048"/>
-            <a:ext cx="4434840" cy="457200"/>
+            <a:off x="6553047" y="5276088"/>
+            <a:ext cx="4724247" cy="1280160"/>
           </a:xfrm>
           <a:prstGeom prst="rect">
             <a:avLst/>
@@ -4346,52 +4260,11 @@
           <a:p>
             <a:pPr algn="l">
               <a:lnSpc>
-                <a:spcPct val="110000"/>
+                <a:spcPct val="145000"/>
               </a:lnSpc>
             </a:pPr>
             <a:r>
-              <a:rPr sz="1600" b="1">
-                <a:solidFill>
-                  <a:srgbClr val="1C2A33"/>
-                </a:solidFill>
-                <a:latin typeface="微软雅黑"/>
-                <a:ea typeface="微软雅黑"/>
-                <a:cs typeface="微软雅黑"/>
-              </a:rPr>
-              <a:t>目标</a:t>
-            </a:r>
-          </a:p>
-        </p:txBody>
-      </p:sp>
-      <p:sp>
-        <p:nvSpPr>
-          <p:cNvPr id="24" name="TextBox 23"/>
-          <p:cNvSpPr txBox="1"/>
-          <p:nvPr/>
-        </p:nvSpPr>
-        <p:spPr>
-          <a:xfrm>
-            <a:off x="6995160" y="4251960"/>
-            <a:ext cx="4434840" cy="1417320"/>
-          </a:xfrm>
-          <a:prstGeom prst="rect">
-            <a:avLst/>
-          </a:prstGeom>
-          <a:noFill/>
-        </p:spPr>
-        <p:txBody>
-          <a:bodyPr wrap="square" anchor="t" lIns="0" rIns="0" tIns="0" bIns="0">
-            <a:spAutoFit/>
-          </a:bodyPr>
-          <a:lstStyle/>
-          <a:p>
-            <a:pPr algn="l">
-              <a:lnSpc>
-                <a:spcPct val="128000"/>
-              </a:lnSpc>
-            </a:pPr>
-            <a:r>
-              <a:rPr sz="1400" b="0">
+              <a:rPr sz="1350" b="0">
                 <a:solidFill>
                   <a:srgbClr val="1C2A33"/>
                 </a:solidFill>
@@ -4406,7 +4279,7 @@
       </p:sp>
       <p:sp>
         <p:nvSpPr>
-          <p:cNvPr id="25" name="TextBox 24"/>
+          <p:cNvPr id="22" name="TextBox 21"/>
           <p:cNvSpPr txBox="1"/>
           <p:nvPr/>
         </p:nvSpPr>
@@ -4533,13 +4406,13 @@
             <a:r>
               <a:rPr sz="1300" b="1">
                 <a:solidFill>
-                  <a:srgbClr val="2E7D6B"/>
+                  <a:srgbClr val="B23A2A"/>
                 </a:solidFill>
                 <a:latin typeface="微软雅黑"/>
                 <a:ea typeface="微软雅黑"/>
                 <a:cs typeface="微软雅黑"/>
               </a:rPr>
-              <a:t>课文背景</a:t>
+              <a:t>背景与权威调研</a:t>
             </a:r>
           </a:p>
         </p:txBody>
@@ -4559,7 +4432,7 @@
             <a:avLst/>
           </a:prstGeom>
           <a:solidFill>
-            <a:srgbClr val="2E7D6B"/>
+            <a:srgbClr val="B23A2A"/>
           </a:solidFill>
           <a:ln>
             <a:noFill/>
@@ -4596,8 +4469,128 @@
         </p:nvSpPr>
         <p:spPr>
           <a:xfrm>
-            <a:off x="640080" y="1508760"/>
-            <a:ext cx="6766560" cy="4572000"/>
+            <a:off x="640080" y="1280160"/>
+            <a:ext cx="10515600" cy="548640"/>
+          </a:xfrm>
+          <a:prstGeom prst="rect">
+            <a:avLst/>
+          </a:prstGeom>
+          <a:noFill/>
+        </p:spPr>
+        <p:txBody>
+          <a:bodyPr wrap="square" anchor="t" lIns="0" rIns="0" tIns="0" bIns="0">
+            <a:spAutoFit/>
+          </a:bodyPr>
+          <a:lstStyle/>
+          <a:p>
+            <a:pPr algn="l"/>
+            <a:r>
+              <a:rPr sz="2800" b="1">
+                <a:solidFill>
+                  <a:srgbClr val="1C2A33"/>
+                </a:solidFill>
+                <a:latin typeface="楷体"/>
+                <a:ea typeface="楷体"/>
+                <a:cs typeface="楷体"/>
+              </a:rPr>
+              <a:t>课文背景与权威来源</a:t>
+            </a:r>
+          </a:p>
+        </p:txBody>
+      </p:sp>
+      <p:sp>
+        <p:nvSpPr>
+          <p:cNvPr id="6" name="Rounded Rectangle 5"/>
+          <p:cNvSpPr/>
+          <p:nvPr/>
+        </p:nvSpPr>
+        <p:spPr>
+          <a:xfrm>
+            <a:off x="640080" y="2057400"/>
+            <a:ext cx="5227167" cy="4206240"/>
+          </a:xfrm>
+          <a:prstGeom prst="roundRect">
+            <a:avLst/>
+          </a:prstGeom>
+          <a:solidFill>
+            <a:srgbClr val="FFFFFF"/>
+          </a:solidFill>
+          <a:ln w="15240">
+            <a:solidFill>
+              <a:srgbClr val="E7DFD2"/>
+            </a:solidFill>
+          </a:ln>
+          <a:effectLst/>
+        </p:spPr>
+        <p:style>
+          <a:lnRef idx="1">
+            <a:schemeClr val="accent1"/>
+          </a:lnRef>
+          <a:fillRef idx="3">
+            <a:schemeClr val="accent1"/>
+          </a:fillRef>
+          <a:effectRef idx="2">
+            <a:schemeClr val="accent1"/>
+          </a:effectRef>
+          <a:fontRef idx="minor">
+            <a:schemeClr val="lt1"/>
+          </a:fontRef>
+        </p:style>
+        <p:txBody>
+          <a:bodyPr rtlCol="0" anchor="ctr"/>
+          <a:lstStyle/>
+          <a:p>
+            <a:pPr algn="ctr"/>
+          </a:p>
+        </p:txBody>
+      </p:sp>
+      <p:sp>
+        <p:nvSpPr>
+          <p:cNvPr id="7" name="TextBox 6"/>
+          <p:cNvSpPr txBox="1"/>
+          <p:nvPr/>
+        </p:nvSpPr>
+        <p:spPr>
+          <a:xfrm>
+            <a:off x="914400" y="2240280"/>
+            <a:ext cx="4678527" cy="411480"/>
+          </a:xfrm>
+          <a:prstGeom prst="rect">
+            <a:avLst/>
+          </a:prstGeom>
+          <a:noFill/>
+        </p:spPr>
+        <p:txBody>
+          <a:bodyPr wrap="square" anchor="t" lIns="0" rIns="0" tIns="0" bIns="0">
+            <a:spAutoFit/>
+          </a:bodyPr>
+          <a:lstStyle/>
+          <a:p>
+            <a:pPr algn="l"/>
+            <a:r>
+              <a:rPr sz="1600" b="1">
+                <a:solidFill>
+                  <a:srgbClr val="2E7D6B"/>
+                </a:solidFill>
+                <a:latin typeface="楷体"/>
+                <a:ea typeface="楷体"/>
+                <a:cs typeface="楷体"/>
+              </a:rPr>
+              <a:t>课文定位</a:t>
+            </a:r>
+          </a:p>
+        </p:txBody>
+      </p:sp>
+      <p:sp>
+        <p:nvSpPr>
+          <p:cNvPr id="8" name="TextBox 7"/>
+          <p:cNvSpPr txBox="1"/>
+          <p:nvPr/>
+        </p:nvSpPr>
+        <p:spPr>
+          <a:xfrm>
+            <a:off x="914400" y="2697480"/>
+            <a:ext cx="4678527" cy="3474720"/>
           </a:xfrm>
           <a:prstGeom prst="rect">
             <a:avLst/>
@@ -4615,11 +4608,11 @@
                 <a:spcPct val="150000"/>
               </a:lnSpc>
               <a:spcAft>
-                <a:spcPts val="600"/>
+                <a:spcPts val="800"/>
               </a:spcAft>
             </a:pPr>
             <a:r>
-              <a:rPr sz="1600" b="0">
+              <a:rPr sz="1400" b="0">
                 <a:solidFill>
                   <a:srgbClr val="1C2A33"/>
                 </a:solidFill>
@@ -4632,41 +4625,60 @@
           </a:p>
         </p:txBody>
       </p:sp>
-      <p:pic>
-        <p:nvPicPr>
-          <p:cNvPr id="6" name="Picture 5" descr="typewriter.jpg"/>
-          <p:cNvPicPr>
-            <a:picLocks noChangeAspect="1"/>
-          </p:cNvPicPr>
-          <p:nvPr/>
-        </p:nvPicPr>
-        <p:blipFill>
-          <a:blip r:embed="rId2"/>
-          <a:srcRect l="5860" r="5860"/>
-          <a:stretch>
-            <a:fillRect/>
-          </a:stretch>
-        </p:blipFill>
-        <p:spPr>
-          <a:xfrm>
-            <a:off x="8046720" y="1508760"/>
-            <a:ext cx="4114800" cy="3108960"/>
-          </a:xfrm>
-          <a:prstGeom prst="rect">
-            <a:avLst/>
-          </a:prstGeom>
-        </p:spPr>
-      </p:pic>
-      <p:sp>
-        <p:nvSpPr>
-          <p:cNvPr id="7" name="TextBox 6"/>
+      <p:sp>
+        <p:nvSpPr>
+          <p:cNvPr id="9" name="Rectangle 8"/>
+          <p:cNvSpPr/>
+          <p:nvPr/>
+        </p:nvSpPr>
+        <p:spPr>
+          <a:xfrm>
+            <a:off x="6324447" y="2057400"/>
+            <a:ext cx="5227167" cy="4206240"/>
+          </a:xfrm>
+          <a:prstGeom prst="rect">
+            <a:avLst/>
+          </a:prstGeom>
+          <a:solidFill>
+            <a:srgbClr val="1C2A33"/>
+          </a:solidFill>
+          <a:ln>
+            <a:noFill/>
+          </a:ln>
+          <a:effectLst/>
+        </p:spPr>
+        <p:style>
+          <a:lnRef idx="1">
+            <a:schemeClr val="accent1"/>
+          </a:lnRef>
+          <a:fillRef idx="3">
+            <a:schemeClr val="accent1"/>
+          </a:fillRef>
+          <a:effectRef idx="2">
+            <a:schemeClr val="accent1"/>
+          </a:effectRef>
+          <a:fontRef idx="minor">
+            <a:schemeClr val="lt1"/>
+          </a:fontRef>
+        </p:style>
+        <p:txBody>
+          <a:bodyPr rtlCol="0" anchor="ctr"/>
+          <a:lstStyle/>
+          <a:p>
+            <a:pPr algn="ctr"/>
+          </a:p>
+        </p:txBody>
+      </p:sp>
+      <p:sp>
+        <p:nvSpPr>
+          <p:cNvPr id="10" name="TextBox 9"/>
           <p:cNvSpPr txBox="1"/>
           <p:nvPr/>
         </p:nvSpPr>
         <p:spPr>
           <a:xfrm>
-            <a:off x="8046720" y="4663440"/>
-            <a:ext cx="4114800" cy="365760"/>
+            <a:off x="6598767" y="2240280"/>
+            <a:ext cx="4678527" cy="411480"/>
           </a:xfrm>
           <a:prstGeom prst="rect">
             <a:avLst/>
@@ -4679,24 +4691,110 @@
           </a:bodyPr>
           <a:lstStyle/>
           <a:p>
-            <a:pPr algn="ctr"/>
-            <a:r>
-              <a:rPr sz="1100" b="0">
-                <a:solidFill>
-                  <a:srgbClr val="6B6258"/>
+            <a:pPr algn="l"/>
+            <a:r>
+              <a:rPr sz="1600" b="1">
+                <a:solidFill>
+                  <a:srgbClr val="C8A86B"/>
+                </a:solidFill>
+                <a:latin typeface="楷体"/>
+                <a:ea typeface="楷体"/>
+                <a:cs typeface="楷体"/>
+              </a:rPr>
+              <a:t>权威来源</a:t>
+            </a:r>
+          </a:p>
+        </p:txBody>
+      </p:sp>
+      <p:sp>
+        <p:nvSpPr>
+          <p:cNvPr id="11" name="TextBox 10"/>
+          <p:cNvSpPr txBox="1"/>
+          <p:nvPr/>
+        </p:nvSpPr>
+        <p:spPr>
+          <a:xfrm>
+            <a:off x="6598767" y="2697480"/>
+            <a:ext cx="4678527" cy="3474720"/>
+          </a:xfrm>
+          <a:prstGeom prst="rect">
+            <a:avLst/>
+          </a:prstGeom>
+          <a:noFill/>
+        </p:spPr>
+        <p:txBody>
+          <a:bodyPr wrap="square" anchor="t" lIns="0" rIns="0" tIns="0" bIns="0">
+            <a:spAutoFit/>
+          </a:bodyPr>
+          <a:lstStyle/>
+          <a:p>
+            <a:pPr algn="l">
+              <a:lnSpc>
+                <a:spcPct val="145000"/>
+              </a:lnSpc>
+              <a:spcAft>
+                <a:spcPts val="700"/>
+              </a:spcAft>
+            </a:pPr>
+            <a:r>
+              <a:rPr sz="1250" b="0">
+                <a:solidFill>
+                  <a:srgbClr val="FFFFFF"/>
                 </a:solidFill>
                 <a:latin typeface="微软雅黑"/>
                 <a:ea typeface="微软雅黑"/>
                 <a:cs typeface="微软雅黑"/>
               </a:rPr>
-              <a:t>资料图（自由授权，复用 typewriter.jpg）</a:t>
-            </a:r>
-          </a:p>
-        </p:txBody>
-      </p:sp>
-      <p:sp>
-        <p:nvSpPr>
-          <p:cNvPr id="8" name="TextBox 7"/>
+              <a:t>· 瑞文网《故都的秋》教学设计（高一必修）</a:t>
+            </a:r>
+          </a:p>
+          <a:p>
+            <a:pPr algn="l">
+              <a:lnSpc>
+                <a:spcPct val="145000"/>
+              </a:lnSpc>
+              <a:spcAft>
+                <a:spcPts val="700"/>
+              </a:spcAft>
+            </a:pPr>
+            <a:r>
+              <a:rPr sz="1250" b="0">
+                <a:solidFill>
+                  <a:srgbClr val="FFFFFF"/>
+                </a:solidFill>
+                <a:latin typeface="微软雅黑"/>
+                <a:ea typeface="微软雅黑"/>
+                <a:cs typeface="微软雅黑"/>
+              </a:rPr>
+              <a:t>· 21世纪教育网《故都的秋》教学设计（统编版必修上）</a:t>
+            </a:r>
+          </a:p>
+          <a:p>
+            <a:pPr algn="l">
+              <a:lnSpc>
+                <a:spcPct val="140000"/>
+              </a:lnSpc>
+              <a:spcBef>
+                <a:spcPts val="1000"/>
+              </a:spcBef>
+            </a:pPr>
+            <a:r>
+              <a:rPr sz="1100" b="0">
+                <a:solidFill>
+                  <a:srgbClr val="C8A86B"/>
+                </a:solidFill>
+                <a:latin typeface="微软雅黑"/>
+                <a:ea typeface="微软雅黑"/>
+                <a:cs typeface="微软雅黑"/>
+              </a:rPr>
+              <a:t>本课件未使用无关配图 · 学科色块设计</a:t>
+            </a:r>
+          </a:p>
+        </p:txBody>
+      </p:sp>
+      <p:sp>
+        <p:nvSpPr>
+          <p:cNvPr id="12" name="TextBox 11"/>
           <p:cNvSpPr txBox="1"/>
           <p:nvPr/>
         </p:nvSpPr>
@@ -4829,7 +4927,7 @@
                 <a:ea typeface="微软雅黑"/>
                 <a:cs typeface="微软雅黑"/>
               </a:rPr>
-              <a:t>学习重点</a:t>
+              <a:t>重点</a:t>
             </a:r>
           </a:p>
         </p:txBody>
@@ -4880,14 +4978,51 @@
       </p:sp>
       <p:sp>
         <p:nvSpPr>
-          <p:cNvPr id="5" name="Rounded Rectangle 4"/>
+          <p:cNvPr id="5" name="TextBox 4"/>
+          <p:cNvSpPr txBox="1"/>
+          <p:nvPr/>
+        </p:nvSpPr>
+        <p:spPr>
+          <a:xfrm>
+            <a:off x="640080" y="1280160"/>
+            <a:ext cx="10515600" cy="548640"/>
+          </a:xfrm>
+          <a:prstGeom prst="rect">
+            <a:avLst/>
+          </a:prstGeom>
+          <a:noFill/>
+        </p:spPr>
+        <p:txBody>
+          <a:bodyPr wrap="square" anchor="t" lIns="0" rIns="0" tIns="0" bIns="0">
+            <a:spAutoFit/>
+          </a:bodyPr>
+          <a:lstStyle/>
+          <a:p>
+            <a:pPr algn="l"/>
+            <a:r>
+              <a:rPr sz="2800" b="1">
+                <a:solidFill>
+                  <a:srgbClr val="1C2A33"/>
+                </a:solidFill>
+                <a:latin typeface="楷体"/>
+                <a:ea typeface="楷体"/>
+                <a:cs typeface="楷体"/>
+              </a:rPr>
+              <a:t>本课重点</a:t>
+            </a:r>
+          </a:p>
+        </p:txBody>
+      </p:sp>
+      <p:sp>
+        <p:nvSpPr>
+          <p:cNvPr id="6" name="Rounded Rectangle 5"/>
           <p:cNvSpPr/>
           <p:nvPr/>
         </p:nvSpPr>
         <p:spPr>
           <a:xfrm>
-            <a:off x="640080" y="1371600"/>
-            <a:ext cx="10911535" cy="1597152"/>
+            <a:off x="640080" y="2194560"/>
+            <a:ext cx="3393338" cy="3840480"/>
           </a:xfrm>
           <a:prstGeom prst="roundRect">
             <a:avLst/>
@@ -4895,7 +5030,343 @@
           <a:solidFill>
             <a:srgbClr val="FFFFFF"/>
           </a:solidFill>
-          <a:ln w="22860">
+          <a:ln w="20320">
+            <a:solidFill>
+              <a:srgbClr val="B23A2A"/>
+            </a:solidFill>
+          </a:ln>
+          <a:effectLst/>
+        </p:spPr>
+        <p:style>
+          <a:lnRef idx="1">
+            <a:schemeClr val="accent1"/>
+          </a:lnRef>
+          <a:fillRef idx="3">
+            <a:schemeClr val="accent1"/>
+          </a:fillRef>
+          <a:effectRef idx="2">
+            <a:schemeClr val="accent1"/>
+          </a:effectRef>
+          <a:fontRef idx="minor">
+            <a:schemeClr val="lt1"/>
+          </a:fontRef>
+        </p:style>
+        <p:txBody>
+          <a:bodyPr rtlCol="0" anchor="ctr"/>
+          <a:lstStyle/>
+          <a:p>
+            <a:pPr algn="ctr"/>
+          </a:p>
+        </p:txBody>
+      </p:sp>
+      <p:sp>
+        <p:nvSpPr>
+          <p:cNvPr id="7" name="Rectangle 6"/>
+          <p:cNvSpPr/>
+          <p:nvPr/>
+        </p:nvSpPr>
+        <p:spPr>
+          <a:xfrm>
+            <a:off x="640080" y="2194560"/>
+            <a:ext cx="3393338" cy="548640"/>
+          </a:xfrm>
+          <a:prstGeom prst="rect">
+            <a:avLst/>
+          </a:prstGeom>
+          <a:solidFill>
+            <a:srgbClr val="B23A2A"/>
+          </a:solidFill>
+          <a:ln>
+            <a:noFill/>
+          </a:ln>
+          <a:effectLst/>
+        </p:spPr>
+        <p:style>
+          <a:lnRef idx="1">
+            <a:schemeClr val="accent1"/>
+          </a:lnRef>
+          <a:fillRef idx="3">
+            <a:schemeClr val="accent1"/>
+          </a:fillRef>
+          <a:effectRef idx="2">
+            <a:schemeClr val="accent1"/>
+          </a:effectRef>
+          <a:fontRef idx="minor">
+            <a:schemeClr val="lt1"/>
+          </a:fontRef>
+        </p:style>
+        <p:txBody>
+          <a:bodyPr rtlCol="0" anchor="ctr"/>
+          <a:lstStyle/>
+          <a:p>
+            <a:pPr algn="ctr"/>
+          </a:p>
+        </p:txBody>
+      </p:sp>
+      <p:sp>
+        <p:nvSpPr>
+          <p:cNvPr id="8" name="TextBox 7"/>
+          <p:cNvSpPr txBox="1"/>
+          <p:nvPr/>
+        </p:nvSpPr>
+        <p:spPr>
+          <a:xfrm>
+            <a:off x="640080" y="2304288"/>
+            <a:ext cx="3393338" cy="365760"/>
+          </a:xfrm>
+          <a:prstGeom prst="rect">
+            <a:avLst/>
+          </a:prstGeom>
+          <a:noFill/>
+        </p:spPr>
+        <p:txBody>
+          <a:bodyPr wrap="square" anchor="t" lIns="0" rIns="0" tIns="0" bIns="0">
+            <a:spAutoFit/>
+          </a:bodyPr>
+          <a:lstStyle/>
+          <a:p>
+            <a:pPr algn="ctr"/>
+            <a:r>
+              <a:rPr sz="1500" b="1">
+                <a:solidFill>
+                  <a:srgbClr val="FFFFFF"/>
+                </a:solidFill>
+                <a:latin typeface="微软雅黑"/>
+                <a:ea typeface="微软雅黑"/>
+                <a:cs typeface="微软雅黑"/>
+              </a:rPr>
+              <a:t>重点 1</a:t>
+            </a:r>
+          </a:p>
+        </p:txBody>
+      </p:sp>
+      <p:sp>
+        <p:nvSpPr>
+          <p:cNvPr id="9" name="TextBox 8"/>
+          <p:cNvSpPr txBox="1"/>
+          <p:nvPr/>
+        </p:nvSpPr>
+        <p:spPr>
+          <a:xfrm>
+            <a:off x="914400" y="2971800"/>
+            <a:ext cx="2844698" cy="2926080"/>
+          </a:xfrm>
+          <a:prstGeom prst="rect">
+            <a:avLst/>
+          </a:prstGeom>
+          <a:noFill/>
+        </p:spPr>
+        <p:txBody>
+          <a:bodyPr wrap="square" anchor="t" lIns="0" rIns="0" tIns="0" bIns="0">
+            <a:spAutoFit/>
+          </a:bodyPr>
+          <a:lstStyle/>
+          <a:p>
+            <a:pPr algn="l">
+              <a:lnSpc>
+                <a:spcPct val="150000"/>
+              </a:lnSpc>
+            </a:pPr>
+            <a:r>
+              <a:rPr sz="1350" b="0">
+                <a:solidFill>
+                  <a:srgbClr val="1C2A33"/>
+                </a:solidFill>
+                <a:latin typeface="楷体"/>
+                <a:ea typeface="楷体"/>
+                <a:cs typeface="楷体"/>
+              </a:rPr>
+              <a:t>文眼——清、静、悲凉（全文基调）。</a:t>
+            </a:r>
+          </a:p>
+        </p:txBody>
+      </p:sp>
+      <p:sp>
+        <p:nvSpPr>
+          <p:cNvPr id="10" name="Rounded Rectangle 9"/>
+          <p:cNvSpPr/>
+          <p:nvPr/>
+        </p:nvSpPr>
+        <p:spPr>
+          <a:xfrm>
+            <a:off x="4399178" y="2194560"/>
+            <a:ext cx="3393338" cy="3840480"/>
+          </a:xfrm>
+          <a:prstGeom prst="roundRect">
+            <a:avLst/>
+          </a:prstGeom>
+          <a:solidFill>
+            <a:srgbClr val="FFFFFF"/>
+          </a:solidFill>
+          <a:ln w="20320">
+            <a:solidFill>
+              <a:srgbClr val="2E7D6B"/>
+            </a:solidFill>
+          </a:ln>
+          <a:effectLst/>
+        </p:spPr>
+        <p:style>
+          <a:lnRef idx="1">
+            <a:schemeClr val="accent1"/>
+          </a:lnRef>
+          <a:fillRef idx="3">
+            <a:schemeClr val="accent1"/>
+          </a:fillRef>
+          <a:effectRef idx="2">
+            <a:schemeClr val="accent1"/>
+          </a:effectRef>
+          <a:fontRef idx="minor">
+            <a:schemeClr val="lt1"/>
+          </a:fontRef>
+        </p:style>
+        <p:txBody>
+          <a:bodyPr rtlCol="0" anchor="ctr"/>
+          <a:lstStyle/>
+          <a:p>
+            <a:pPr algn="ctr"/>
+          </a:p>
+        </p:txBody>
+      </p:sp>
+      <p:sp>
+        <p:nvSpPr>
+          <p:cNvPr id="11" name="Rectangle 10"/>
+          <p:cNvSpPr/>
+          <p:nvPr/>
+        </p:nvSpPr>
+        <p:spPr>
+          <a:xfrm>
+            <a:off x="4399178" y="2194560"/>
+            <a:ext cx="3393338" cy="548640"/>
+          </a:xfrm>
+          <a:prstGeom prst="rect">
+            <a:avLst/>
+          </a:prstGeom>
+          <a:solidFill>
+            <a:srgbClr val="2E7D6B"/>
+          </a:solidFill>
+          <a:ln>
+            <a:noFill/>
+          </a:ln>
+          <a:effectLst/>
+        </p:spPr>
+        <p:style>
+          <a:lnRef idx="1">
+            <a:schemeClr val="accent1"/>
+          </a:lnRef>
+          <a:fillRef idx="3">
+            <a:schemeClr val="accent1"/>
+          </a:fillRef>
+          <a:effectRef idx="2">
+            <a:schemeClr val="accent1"/>
+          </a:effectRef>
+          <a:fontRef idx="minor">
+            <a:schemeClr val="lt1"/>
+          </a:fontRef>
+        </p:style>
+        <p:txBody>
+          <a:bodyPr rtlCol="0" anchor="ctr"/>
+          <a:lstStyle/>
+          <a:p>
+            <a:pPr algn="ctr"/>
+          </a:p>
+        </p:txBody>
+      </p:sp>
+      <p:sp>
+        <p:nvSpPr>
+          <p:cNvPr id="12" name="TextBox 11"/>
+          <p:cNvSpPr txBox="1"/>
+          <p:nvPr/>
+        </p:nvSpPr>
+        <p:spPr>
+          <a:xfrm>
+            <a:off x="4399178" y="2304288"/>
+            <a:ext cx="3393338" cy="365760"/>
+          </a:xfrm>
+          <a:prstGeom prst="rect">
+            <a:avLst/>
+          </a:prstGeom>
+          <a:noFill/>
+        </p:spPr>
+        <p:txBody>
+          <a:bodyPr wrap="square" anchor="t" lIns="0" rIns="0" tIns="0" bIns="0">
+            <a:spAutoFit/>
+          </a:bodyPr>
+          <a:lstStyle/>
+          <a:p>
+            <a:pPr algn="ctr"/>
+            <a:r>
+              <a:rPr sz="1500" b="1">
+                <a:solidFill>
+                  <a:srgbClr val="FFFFFF"/>
+                </a:solidFill>
+                <a:latin typeface="微软雅黑"/>
+                <a:ea typeface="微软雅黑"/>
+                <a:cs typeface="微软雅黑"/>
+              </a:rPr>
+              <a:t>重点 2</a:t>
+            </a:r>
+          </a:p>
+        </p:txBody>
+      </p:sp>
+      <p:sp>
+        <p:nvSpPr>
+          <p:cNvPr id="13" name="TextBox 12"/>
+          <p:cNvSpPr txBox="1"/>
+          <p:nvPr/>
+        </p:nvSpPr>
+        <p:spPr>
+          <a:xfrm>
+            <a:off x="4673498" y="2971800"/>
+            <a:ext cx="2844698" cy="2926080"/>
+          </a:xfrm>
+          <a:prstGeom prst="rect">
+            <a:avLst/>
+          </a:prstGeom>
+          <a:noFill/>
+        </p:spPr>
+        <p:txBody>
+          <a:bodyPr wrap="square" anchor="t" lIns="0" rIns="0" tIns="0" bIns="0">
+            <a:spAutoFit/>
+          </a:bodyPr>
+          <a:lstStyle/>
+          <a:p>
+            <a:pPr algn="l">
+              <a:lnSpc>
+                <a:spcPct val="150000"/>
+              </a:lnSpc>
+            </a:pPr>
+            <a:r>
+              <a:rPr sz="1350" b="0">
+                <a:solidFill>
+                  <a:srgbClr val="1C2A33"/>
+                </a:solidFill>
+                <a:latin typeface="楷体"/>
+                <a:ea typeface="楷体"/>
+                <a:cs typeface="楷体"/>
+              </a:rPr>
+              <a:t>五幅画面——庭院秋景、槐树落蕊、秋蝉残声、秋雨闲人、秋果胜果。</a:t>
+            </a:r>
+          </a:p>
+        </p:txBody>
+      </p:sp>
+      <p:sp>
+        <p:nvSpPr>
+          <p:cNvPr id="14" name="Rounded Rectangle 13"/>
+          <p:cNvSpPr/>
+          <p:nvPr/>
+        </p:nvSpPr>
+        <p:spPr>
+          <a:xfrm>
+            <a:off x="8158276" y="2194560"/>
+            <a:ext cx="3393338" cy="3840480"/>
+          </a:xfrm>
+          <a:prstGeom prst="roundRect">
+            <a:avLst/>
+          </a:prstGeom>
+          <a:solidFill>
+            <a:srgbClr val="FFFFFF"/>
+          </a:solidFill>
+          <a:ln w="20320">
             <a:solidFill>
               <a:srgbClr val="C8A86B"/>
             </a:solidFill>
@@ -4926,107 +5397,23 @@
       </p:sp>
       <p:sp>
         <p:nvSpPr>
-          <p:cNvPr id="6" name="TextBox 5"/>
-          <p:cNvSpPr txBox="1"/>
-          <p:nvPr/>
-        </p:nvSpPr>
-        <p:spPr>
-          <a:xfrm>
-            <a:off x="1371600" y="1481328"/>
-            <a:ext cx="9997135" cy="457200"/>
-          </a:xfrm>
-          <a:prstGeom prst="rect">
-            <a:avLst/>
-          </a:prstGeom>
-          <a:noFill/>
-        </p:spPr>
-        <p:txBody>
-          <a:bodyPr wrap="square" anchor="t" lIns="0" rIns="0" tIns="0" bIns="0">
-            <a:spAutoFit/>
-          </a:bodyPr>
-          <a:lstStyle/>
-          <a:p>
-            <a:pPr algn="l">
-              <a:lnSpc>
-                <a:spcPct val="110000"/>
-              </a:lnSpc>
-            </a:pPr>
-            <a:r>
-              <a:rPr sz="1600" b="1">
-                <a:solidFill>
-                  <a:srgbClr val="1C2A33"/>
-                </a:solidFill>
-                <a:latin typeface="微软雅黑"/>
-                <a:ea typeface="微软雅黑"/>
-                <a:cs typeface="微软雅黑"/>
-              </a:rPr>
-              <a:t/>
-            </a:r>
-          </a:p>
-        </p:txBody>
-      </p:sp>
-      <p:sp>
-        <p:nvSpPr>
-          <p:cNvPr id="7" name="TextBox 6"/>
-          <p:cNvSpPr txBox="1"/>
-          <p:nvPr/>
-        </p:nvSpPr>
-        <p:spPr>
-          <a:xfrm>
-            <a:off x="1371600" y="1920240"/>
-            <a:ext cx="9997135" cy="957072"/>
-          </a:xfrm>
-          <a:prstGeom prst="rect">
-            <a:avLst/>
-          </a:prstGeom>
-          <a:noFill/>
-        </p:spPr>
-        <p:txBody>
-          <a:bodyPr wrap="square" anchor="t" lIns="0" rIns="0" tIns="0" bIns="0">
-            <a:spAutoFit/>
-          </a:bodyPr>
-          <a:lstStyle/>
-          <a:p>
-            <a:pPr algn="l">
-              <a:lnSpc>
-                <a:spcPct val="128000"/>
-              </a:lnSpc>
-            </a:pPr>
-            <a:r>
-              <a:rPr sz="1300" b="0">
-                <a:solidFill>
-                  <a:srgbClr val="1C2A33"/>
-                </a:solidFill>
-                <a:latin typeface="楷体"/>
-                <a:ea typeface="楷体"/>
-                <a:cs typeface="楷体"/>
-              </a:rPr>
-              <a:t>① 文眼：清、静、悲凉（全文基调）。</a:t>
-            </a:r>
-          </a:p>
-        </p:txBody>
-      </p:sp>
-      <p:sp>
-        <p:nvSpPr>
-          <p:cNvPr id="8" name="Rounded Rectangle 7"/>
+          <p:cNvPr id="15" name="Rectangle 14"/>
           <p:cNvSpPr/>
           <p:nvPr/>
         </p:nvSpPr>
         <p:spPr>
           <a:xfrm>
-            <a:off x="640080" y="3078480"/>
-            <a:ext cx="10911535" cy="1597152"/>
-          </a:xfrm>
-          <a:prstGeom prst="roundRect">
+            <a:off x="8158276" y="2194560"/>
+            <a:ext cx="3393338" cy="548640"/>
+          </a:xfrm>
+          <a:prstGeom prst="rect">
             <a:avLst/>
           </a:prstGeom>
           <a:solidFill>
-            <a:srgbClr val="FFFFFF"/>
+            <a:srgbClr val="C8A86B"/>
           </a:solidFill>
-          <a:ln w="22860">
-            <a:solidFill>
-              <a:srgbClr val="C8A86B"/>
-            </a:solidFill>
+          <a:ln>
+            <a:noFill/>
           </a:ln>
           <a:effectLst/>
         </p:spPr>
@@ -5054,14 +5441,14 @@
       </p:sp>
       <p:sp>
         <p:nvSpPr>
-          <p:cNvPr id="9" name="TextBox 8"/>
+          <p:cNvPr id="16" name="TextBox 15"/>
           <p:cNvSpPr txBox="1"/>
           <p:nvPr/>
         </p:nvSpPr>
         <p:spPr>
           <a:xfrm>
-            <a:off x="1371600" y="3188208"/>
-            <a:ext cx="9997135" cy="457200"/>
+            <a:off x="8158276" y="2304288"/>
+            <a:ext cx="3393338" cy="365760"/>
           </a:xfrm>
           <a:prstGeom prst="rect">
             <a:avLst/>
@@ -5074,35 +5461,31 @@
           </a:bodyPr>
           <a:lstStyle/>
           <a:p>
-            <a:pPr algn="l">
-              <a:lnSpc>
-                <a:spcPct val="110000"/>
-              </a:lnSpc>
-            </a:pPr>
-            <a:r>
-              <a:rPr sz="1600" b="1">
-                <a:solidFill>
-                  <a:srgbClr val="1C2A33"/>
+            <a:pPr algn="ctr"/>
+            <a:r>
+              <a:rPr sz="1500" b="1">
+                <a:solidFill>
+                  <a:srgbClr val="FFFFFF"/>
                 </a:solidFill>
                 <a:latin typeface="微软雅黑"/>
                 <a:ea typeface="微软雅黑"/>
                 <a:cs typeface="微软雅黑"/>
               </a:rPr>
-              <a:t/>
-            </a:r>
-          </a:p>
-        </p:txBody>
-      </p:sp>
-      <p:sp>
-        <p:nvSpPr>
-          <p:cNvPr id="10" name="TextBox 9"/>
+              <a:t>重点 3</a:t>
+            </a:r>
+          </a:p>
+        </p:txBody>
+      </p:sp>
+      <p:sp>
+        <p:nvSpPr>
+          <p:cNvPr id="17" name="TextBox 16"/>
           <p:cNvSpPr txBox="1"/>
           <p:nvPr/>
         </p:nvSpPr>
         <p:spPr>
           <a:xfrm>
-            <a:off x="1371600" y="3627120"/>
-            <a:ext cx="9997135" cy="957072"/>
+            <a:off x="8432596" y="2971800"/>
+            <a:ext cx="2844698" cy="2926080"/>
           </a:xfrm>
           <a:prstGeom prst="rect">
             <a:avLst/>
@@ -5117,11 +5500,11 @@
           <a:p>
             <a:pPr algn="l">
               <a:lnSpc>
-                <a:spcPct val="128000"/>
+                <a:spcPct val="150000"/>
               </a:lnSpc>
             </a:pPr>
             <a:r>
-              <a:rPr sz="1300" b="0">
+              <a:rPr sz="1350" b="0">
                 <a:solidFill>
                   <a:srgbClr val="1C2A33"/>
                 </a:solidFill>
@@ -5129,142 +5512,14 @@
                 <a:ea typeface="楷体"/>
                 <a:cs typeface="楷体"/>
               </a:rPr>
-              <a:t>② 五幅画面：庭院秋景、槐树落蕊、秋蝉残声、秋雨闲人、秋果胜果。</a:t>
-            </a:r>
-          </a:p>
-        </p:txBody>
-      </p:sp>
-      <p:sp>
-        <p:nvSpPr>
-          <p:cNvPr id="11" name="Rounded Rectangle 10"/>
-          <p:cNvSpPr/>
-          <p:nvPr/>
-        </p:nvSpPr>
-        <p:spPr>
-          <a:xfrm>
-            <a:off x="640080" y="4785360"/>
-            <a:ext cx="10911535" cy="1597152"/>
-          </a:xfrm>
-          <a:prstGeom prst="roundRect">
-            <a:avLst/>
-          </a:prstGeom>
-          <a:solidFill>
-            <a:srgbClr val="FFFFFF"/>
-          </a:solidFill>
-          <a:ln w="22860">
-            <a:solidFill>
-              <a:srgbClr val="C8A86B"/>
-            </a:solidFill>
-          </a:ln>
-          <a:effectLst/>
-        </p:spPr>
-        <p:style>
-          <a:lnRef idx="1">
-            <a:schemeClr val="accent1"/>
-          </a:lnRef>
-          <a:fillRef idx="3">
-            <a:schemeClr val="accent1"/>
-          </a:fillRef>
-          <a:effectRef idx="2">
-            <a:schemeClr val="accent1"/>
-          </a:effectRef>
-          <a:fontRef idx="minor">
-            <a:schemeClr val="lt1"/>
-          </a:fontRef>
-        </p:style>
-        <p:txBody>
-          <a:bodyPr rtlCol="0" anchor="ctr"/>
-          <a:lstStyle/>
-          <a:p>
-            <a:pPr algn="ctr"/>
-          </a:p>
-        </p:txBody>
-      </p:sp>
-      <p:sp>
-        <p:nvSpPr>
-          <p:cNvPr id="12" name="TextBox 11"/>
-          <p:cNvSpPr txBox="1"/>
-          <p:nvPr/>
-        </p:nvSpPr>
-        <p:spPr>
-          <a:xfrm>
-            <a:off x="1371600" y="4895088"/>
-            <a:ext cx="9997135" cy="457200"/>
-          </a:xfrm>
-          <a:prstGeom prst="rect">
-            <a:avLst/>
-          </a:prstGeom>
-          <a:noFill/>
-        </p:spPr>
-        <p:txBody>
-          <a:bodyPr wrap="square" anchor="t" lIns="0" rIns="0" tIns="0" bIns="0">
-            <a:spAutoFit/>
-          </a:bodyPr>
-          <a:lstStyle/>
-          <a:p>
-            <a:pPr algn="l">
-              <a:lnSpc>
-                <a:spcPct val="110000"/>
-              </a:lnSpc>
-            </a:pPr>
-            <a:r>
-              <a:rPr sz="1600" b="1">
-                <a:solidFill>
-                  <a:srgbClr val="1C2A33"/>
-                </a:solidFill>
-                <a:latin typeface="微软雅黑"/>
-                <a:ea typeface="微软雅黑"/>
-                <a:cs typeface="微软雅黑"/>
-              </a:rPr>
-              <a:t/>
-            </a:r>
-          </a:p>
-        </p:txBody>
-      </p:sp>
-      <p:sp>
-        <p:nvSpPr>
-          <p:cNvPr id="13" name="TextBox 12"/>
-          <p:cNvSpPr txBox="1"/>
-          <p:nvPr/>
-        </p:nvSpPr>
-        <p:spPr>
-          <a:xfrm>
-            <a:off x="1371600" y="5334000"/>
-            <a:ext cx="9997135" cy="957072"/>
-          </a:xfrm>
-          <a:prstGeom prst="rect">
-            <a:avLst/>
-          </a:prstGeom>
-          <a:noFill/>
-        </p:spPr>
-        <p:txBody>
-          <a:bodyPr wrap="square" anchor="t" lIns="0" rIns="0" tIns="0" bIns="0">
-            <a:spAutoFit/>
-          </a:bodyPr>
-          <a:lstStyle/>
-          <a:p>
-            <a:pPr algn="l">
-              <a:lnSpc>
-                <a:spcPct val="128000"/>
-              </a:lnSpc>
-            </a:pPr>
-            <a:r>
-              <a:rPr sz="1300" b="0">
-                <a:solidFill>
-                  <a:srgbClr val="1C2A33"/>
-                </a:solidFill>
-                <a:latin typeface="楷体"/>
-                <a:ea typeface="楷体"/>
-                <a:cs typeface="楷体"/>
-              </a:rPr>
-              <a:t>③ 形散神聚：选材散（五幅）而神聚（悲凉一贯）。</a:t>
-            </a:r>
-          </a:p>
-        </p:txBody>
-      </p:sp>
-      <p:sp>
-        <p:nvSpPr>
-          <p:cNvPr id="14" name="TextBox 13"/>
+              <a:t>形散神聚——选材散（五幅）而神聚（悲凉一贯）。</a:t>
+            </a:r>
+          </a:p>
+        </p:txBody>
+      </p:sp>
+      <p:sp>
+        <p:nvSpPr>
+          <p:cNvPr id="18" name="TextBox 17"/>
           <p:cNvSpPr txBox="1"/>
           <p:nvPr/>
         </p:nvSpPr>
@@ -5391,13 +5646,13 @@
             <a:r>
               <a:rPr sz="1300" b="1">
                 <a:solidFill>
-                  <a:srgbClr val="2E7D6B"/>
+                  <a:srgbClr val="B23A2A"/>
                 </a:solidFill>
                 <a:latin typeface="微软雅黑"/>
                 <a:ea typeface="微软雅黑"/>
                 <a:cs typeface="微软雅黑"/>
               </a:rPr>
-              <a:t>学习路径</a:t>
+              <a:t>方法</a:t>
             </a:r>
           </a:p>
         </p:txBody>
@@ -5414,6 +5669,338 @@
             <a:ext cx="822960" cy="30480"/>
           </a:xfrm>
           <a:prstGeom prst="rect">
+            <a:avLst/>
+          </a:prstGeom>
+          <a:solidFill>
+            <a:srgbClr val="B23A2A"/>
+          </a:solidFill>
+          <a:ln>
+            <a:noFill/>
+          </a:ln>
+          <a:effectLst/>
+        </p:spPr>
+        <p:style>
+          <a:lnRef idx="1">
+            <a:schemeClr val="accent1"/>
+          </a:lnRef>
+          <a:fillRef idx="3">
+            <a:schemeClr val="accent1"/>
+          </a:fillRef>
+          <a:effectRef idx="2">
+            <a:schemeClr val="accent1"/>
+          </a:effectRef>
+          <a:fontRef idx="minor">
+            <a:schemeClr val="lt1"/>
+          </a:fontRef>
+        </p:style>
+        <p:txBody>
+          <a:bodyPr rtlCol="0" anchor="ctr"/>
+          <a:lstStyle/>
+          <a:p>
+            <a:pPr algn="ctr"/>
+          </a:p>
+        </p:txBody>
+      </p:sp>
+      <p:sp>
+        <p:nvSpPr>
+          <p:cNvPr id="5" name="TextBox 4"/>
+          <p:cNvSpPr txBox="1"/>
+          <p:nvPr/>
+        </p:nvSpPr>
+        <p:spPr>
+          <a:xfrm>
+            <a:off x="640080" y="1280160"/>
+            <a:ext cx="10515600" cy="548640"/>
+          </a:xfrm>
+          <a:prstGeom prst="rect">
+            <a:avLst/>
+          </a:prstGeom>
+          <a:noFill/>
+        </p:spPr>
+        <p:txBody>
+          <a:bodyPr wrap="square" anchor="t" lIns="0" rIns="0" tIns="0" bIns="0">
+            <a:spAutoFit/>
+          </a:bodyPr>
+          <a:lstStyle/>
+          <a:p>
+            <a:pPr algn="l"/>
+            <a:r>
+              <a:rPr sz="2800" b="1">
+                <a:solidFill>
+                  <a:srgbClr val="1C2A33"/>
+                </a:solidFill>
+                <a:latin typeface="楷体"/>
+                <a:ea typeface="楷体"/>
+                <a:cs typeface="楷体"/>
+              </a:rPr>
+              <a:t>学习路径与方法</a:t>
+            </a:r>
+          </a:p>
+        </p:txBody>
+      </p:sp>
+      <p:sp>
+        <p:nvSpPr>
+          <p:cNvPr id="6" name="Rounded Rectangle 5"/>
+          <p:cNvSpPr/>
+          <p:nvPr/>
+        </p:nvSpPr>
+        <p:spPr>
+          <a:xfrm>
+            <a:off x="640080" y="2194560"/>
+            <a:ext cx="5272887" cy="1828800"/>
+          </a:xfrm>
+          <a:prstGeom prst="roundRect">
+            <a:avLst/>
+          </a:prstGeom>
+          <a:solidFill>
+            <a:srgbClr val="FFFFFF"/>
+          </a:solidFill>
+          <a:ln w="20320">
+            <a:solidFill>
+              <a:srgbClr val="B23A2A"/>
+            </a:solidFill>
+          </a:ln>
+          <a:effectLst/>
+        </p:spPr>
+        <p:style>
+          <a:lnRef idx="1">
+            <a:schemeClr val="accent1"/>
+          </a:lnRef>
+          <a:fillRef idx="3">
+            <a:schemeClr val="accent1"/>
+          </a:fillRef>
+          <a:effectRef idx="2">
+            <a:schemeClr val="accent1"/>
+          </a:effectRef>
+          <a:fontRef idx="minor">
+            <a:schemeClr val="lt1"/>
+          </a:fontRef>
+        </p:style>
+        <p:txBody>
+          <a:bodyPr rtlCol="0" anchor="ctr"/>
+          <a:lstStyle/>
+          <a:p>
+            <a:pPr algn="ctr"/>
+          </a:p>
+        </p:txBody>
+      </p:sp>
+      <p:sp>
+        <p:nvSpPr>
+          <p:cNvPr id="7" name="Oval 6"/>
+          <p:cNvSpPr/>
+          <p:nvPr/>
+        </p:nvSpPr>
+        <p:spPr>
+          <a:xfrm>
+            <a:off x="841248" y="2395728"/>
+            <a:ext cx="502920" cy="502920"/>
+          </a:xfrm>
+          <a:prstGeom prst="ellipse">
+            <a:avLst/>
+          </a:prstGeom>
+          <a:solidFill>
+            <a:srgbClr val="B23A2A"/>
+          </a:solidFill>
+          <a:ln>
+            <a:noFill/>
+          </a:ln>
+          <a:effectLst/>
+        </p:spPr>
+        <p:style>
+          <a:lnRef idx="1">
+            <a:schemeClr val="accent1"/>
+          </a:lnRef>
+          <a:fillRef idx="3">
+            <a:schemeClr val="accent1"/>
+          </a:fillRef>
+          <a:effectRef idx="2">
+            <a:schemeClr val="accent1"/>
+          </a:effectRef>
+          <a:fontRef idx="minor">
+            <a:schemeClr val="lt1"/>
+          </a:fontRef>
+        </p:style>
+        <p:txBody>
+          <a:bodyPr rtlCol="0" anchor="ctr"/>
+          <a:lstStyle/>
+          <a:p>
+            <a:pPr algn="ctr"/>
+          </a:p>
+        </p:txBody>
+      </p:sp>
+      <p:sp>
+        <p:nvSpPr>
+          <p:cNvPr id="8" name="TextBox 7"/>
+          <p:cNvSpPr txBox="1"/>
+          <p:nvPr/>
+        </p:nvSpPr>
+        <p:spPr>
+          <a:xfrm>
+            <a:off x="841248" y="2468880"/>
+            <a:ext cx="502920" cy="365760"/>
+          </a:xfrm>
+          <a:prstGeom prst="rect">
+            <a:avLst/>
+          </a:prstGeom>
+          <a:noFill/>
+        </p:spPr>
+        <p:txBody>
+          <a:bodyPr wrap="square" anchor="t" lIns="0" rIns="0" tIns="0" bIns="0">
+            <a:spAutoFit/>
+          </a:bodyPr>
+          <a:lstStyle/>
+          <a:p>
+            <a:pPr algn="ctr"/>
+            <a:r>
+              <a:rPr sz="1800" b="1">
+                <a:solidFill>
+                  <a:srgbClr val="FFFFFF"/>
+                </a:solidFill>
+                <a:latin typeface="微软雅黑"/>
+                <a:ea typeface="微软雅黑"/>
+                <a:cs typeface="微软雅黑"/>
+              </a:rPr>
+              <a:t>1</a:t>
+            </a:r>
+          </a:p>
+        </p:txBody>
+      </p:sp>
+      <p:sp>
+        <p:nvSpPr>
+          <p:cNvPr id="9" name="TextBox 8"/>
+          <p:cNvSpPr txBox="1"/>
+          <p:nvPr/>
+        </p:nvSpPr>
+        <p:spPr>
+          <a:xfrm>
+            <a:off x="1508760" y="2414016"/>
+            <a:ext cx="4267047" cy="457200"/>
+          </a:xfrm>
+          <a:prstGeom prst="rect">
+            <a:avLst/>
+          </a:prstGeom>
+          <a:noFill/>
+        </p:spPr>
+        <p:txBody>
+          <a:bodyPr wrap="square" anchor="t" lIns="0" rIns="0" tIns="0" bIns="0">
+            <a:spAutoFit/>
+          </a:bodyPr>
+          <a:lstStyle/>
+          <a:p>
+            <a:pPr algn="l"/>
+            <a:r>
+              <a:rPr sz="1650" b="1">
+                <a:solidFill>
+                  <a:srgbClr val="B23A2A"/>
+                </a:solidFill>
+                <a:latin typeface="楷体"/>
+                <a:ea typeface="楷体"/>
+                <a:cs typeface="楷体"/>
+              </a:rPr>
+              <a:t>诵读品读</a:t>
+            </a:r>
+          </a:p>
+        </p:txBody>
+      </p:sp>
+      <p:sp>
+        <p:nvSpPr>
+          <p:cNvPr id="10" name="TextBox 9"/>
+          <p:cNvSpPr txBox="1"/>
+          <p:nvPr/>
+        </p:nvSpPr>
+        <p:spPr>
+          <a:xfrm>
+            <a:off x="914400" y="3063240"/>
+            <a:ext cx="4724247" cy="822960"/>
+          </a:xfrm>
+          <a:prstGeom prst="rect">
+            <a:avLst/>
+          </a:prstGeom>
+          <a:noFill/>
+        </p:spPr>
+        <p:txBody>
+          <a:bodyPr wrap="square" anchor="t" lIns="0" rIns="0" tIns="0" bIns="0">
+            <a:spAutoFit/>
+          </a:bodyPr>
+          <a:lstStyle/>
+          <a:p>
+            <a:pPr algn="l">
+              <a:lnSpc>
+                <a:spcPct val="150000"/>
+              </a:lnSpc>
+            </a:pPr>
+            <a:r>
+              <a:rPr sz="1300" b="0">
+                <a:solidFill>
+                  <a:srgbClr val="1C2A33"/>
+                </a:solidFill>
+                <a:latin typeface="楷体"/>
+                <a:ea typeface="楷体"/>
+                <a:cs typeface="楷体"/>
+              </a:rPr>
+              <a:t>听朗读，自己品读，读出「清静悲凉」的慢与淡。</a:t>
+            </a:r>
+          </a:p>
+        </p:txBody>
+      </p:sp>
+      <p:sp>
+        <p:nvSpPr>
+          <p:cNvPr id="11" name="Rounded Rectangle 10"/>
+          <p:cNvSpPr/>
+          <p:nvPr/>
+        </p:nvSpPr>
+        <p:spPr>
+          <a:xfrm>
+            <a:off x="6278727" y="2194560"/>
+            <a:ext cx="5272887" cy="1828800"/>
+          </a:xfrm>
+          <a:prstGeom prst="roundRect">
+            <a:avLst/>
+          </a:prstGeom>
+          <a:solidFill>
+            <a:srgbClr val="FFFFFF"/>
+          </a:solidFill>
+          <a:ln w="20320">
+            <a:solidFill>
+              <a:srgbClr val="2E7D6B"/>
+            </a:solidFill>
+          </a:ln>
+          <a:effectLst/>
+        </p:spPr>
+        <p:style>
+          <a:lnRef idx="1">
+            <a:schemeClr val="accent1"/>
+          </a:lnRef>
+          <a:fillRef idx="3">
+            <a:schemeClr val="accent1"/>
+          </a:fillRef>
+          <a:effectRef idx="2">
+            <a:schemeClr val="accent1"/>
+          </a:effectRef>
+          <a:fontRef idx="minor">
+            <a:schemeClr val="lt1"/>
+          </a:fontRef>
+        </p:style>
+        <p:txBody>
+          <a:bodyPr rtlCol="0" anchor="ctr"/>
+          <a:lstStyle/>
+          <a:p>
+            <a:pPr algn="ctr"/>
+          </a:p>
+        </p:txBody>
+      </p:sp>
+      <p:sp>
+        <p:nvSpPr>
+          <p:cNvPr id="12" name="Oval 11"/>
+          <p:cNvSpPr/>
+          <p:nvPr/>
+        </p:nvSpPr>
+        <p:spPr>
+          <a:xfrm>
+            <a:off x="6479895" y="2395728"/>
+            <a:ext cx="502920" cy="502920"/>
+          </a:xfrm>
+          <a:prstGeom prst="ellipse">
             <a:avLst/>
           </a:prstGeom>
           <a:solidFill>
@@ -5448,14 +6035,129 @@
       </p:sp>
       <p:sp>
         <p:nvSpPr>
-          <p:cNvPr id="5" name="Rounded Rectangle 4"/>
+          <p:cNvPr id="13" name="TextBox 12"/>
+          <p:cNvSpPr txBox="1"/>
+          <p:nvPr/>
+        </p:nvSpPr>
+        <p:spPr>
+          <a:xfrm>
+            <a:off x="6479895" y="2468880"/>
+            <a:ext cx="502920" cy="365760"/>
+          </a:xfrm>
+          <a:prstGeom prst="rect">
+            <a:avLst/>
+          </a:prstGeom>
+          <a:noFill/>
+        </p:spPr>
+        <p:txBody>
+          <a:bodyPr wrap="square" anchor="t" lIns="0" rIns="0" tIns="0" bIns="0">
+            <a:spAutoFit/>
+          </a:bodyPr>
+          <a:lstStyle/>
+          <a:p>
+            <a:pPr algn="ctr"/>
+            <a:r>
+              <a:rPr sz="1800" b="1">
+                <a:solidFill>
+                  <a:srgbClr val="FFFFFF"/>
+                </a:solidFill>
+                <a:latin typeface="微软雅黑"/>
+                <a:ea typeface="微软雅黑"/>
+                <a:cs typeface="微软雅黑"/>
+              </a:rPr>
+              <a:t>2</a:t>
+            </a:r>
+          </a:p>
+        </p:txBody>
+      </p:sp>
+      <p:sp>
+        <p:nvSpPr>
+          <p:cNvPr id="14" name="TextBox 13"/>
+          <p:cNvSpPr txBox="1"/>
+          <p:nvPr/>
+        </p:nvSpPr>
+        <p:spPr>
+          <a:xfrm>
+            <a:off x="7147407" y="2414016"/>
+            <a:ext cx="4267047" cy="457200"/>
+          </a:xfrm>
+          <a:prstGeom prst="rect">
+            <a:avLst/>
+          </a:prstGeom>
+          <a:noFill/>
+        </p:spPr>
+        <p:txBody>
+          <a:bodyPr wrap="square" anchor="t" lIns="0" rIns="0" tIns="0" bIns="0">
+            <a:spAutoFit/>
+          </a:bodyPr>
+          <a:lstStyle/>
+          <a:p>
+            <a:pPr algn="l"/>
+            <a:r>
+              <a:rPr sz="1650" b="1">
+                <a:solidFill>
+                  <a:srgbClr val="2E7D6B"/>
+                </a:solidFill>
+                <a:latin typeface="楷体"/>
+                <a:ea typeface="楷体"/>
+                <a:cs typeface="楷体"/>
+              </a:rPr>
+              <a:t>画面归纳</a:t>
+            </a:r>
+          </a:p>
+        </p:txBody>
+      </p:sp>
+      <p:sp>
+        <p:nvSpPr>
+          <p:cNvPr id="15" name="TextBox 14"/>
+          <p:cNvSpPr txBox="1"/>
+          <p:nvPr/>
+        </p:nvSpPr>
+        <p:spPr>
+          <a:xfrm>
+            <a:off x="6553047" y="3063240"/>
+            <a:ext cx="4724247" cy="822960"/>
+          </a:xfrm>
+          <a:prstGeom prst="rect">
+            <a:avLst/>
+          </a:prstGeom>
+          <a:noFill/>
+        </p:spPr>
+        <p:txBody>
+          <a:bodyPr wrap="square" anchor="t" lIns="0" rIns="0" tIns="0" bIns="0">
+            <a:spAutoFit/>
+          </a:bodyPr>
+          <a:lstStyle/>
+          <a:p>
+            <a:pPr algn="l">
+              <a:lnSpc>
+                <a:spcPct val="150000"/>
+              </a:lnSpc>
+            </a:pPr>
+            <a:r>
+              <a:rPr sz="1300" b="0">
+                <a:solidFill>
+                  <a:srgbClr val="1C2A33"/>
+                </a:solidFill>
+                <a:latin typeface="楷体"/>
+                <a:ea typeface="楷体"/>
+                <a:cs typeface="楷体"/>
+              </a:rPr>
+              <a:t>找出五幅秋景，各摘一句原文。</a:t>
+            </a:r>
+          </a:p>
+        </p:txBody>
+      </p:sp>
+      <p:sp>
+        <p:nvSpPr>
+          <p:cNvPr id="16" name="Rounded Rectangle 15"/>
           <p:cNvSpPr/>
           <p:nvPr/>
         </p:nvSpPr>
         <p:spPr>
           <a:xfrm>
-            <a:off x="640080" y="1371600"/>
-            <a:ext cx="10911535" cy="685800"/>
+            <a:off x="640080" y="4389120"/>
+            <a:ext cx="5272887" cy="1828800"/>
           </a:xfrm>
           <a:prstGeom prst="roundRect">
             <a:avLst/>
@@ -5463,9 +6165,9 @@
           <a:solidFill>
             <a:srgbClr val="FFFFFF"/>
           </a:solidFill>
-          <a:ln w="22860">
+          <a:ln w="20320">
             <a:solidFill>
-              <a:srgbClr val="2E7D6B"/>
+              <a:srgbClr val="C8A86B"/>
             </a:solidFill>
           </a:ln>
           <a:effectLst/>
@@ -5494,20 +6196,20 @@
       </p:sp>
       <p:sp>
         <p:nvSpPr>
-          <p:cNvPr id="6" name="Oval 5"/>
+          <p:cNvPr id="17" name="Oval 16"/>
           <p:cNvSpPr/>
           <p:nvPr/>
         </p:nvSpPr>
         <p:spPr>
           <a:xfrm>
-            <a:off x="804672" y="1536192"/>
-            <a:ext cx="457200" cy="457200"/>
+            <a:off x="841248" y="4590288"/>
+            <a:ext cx="502920" cy="502920"/>
           </a:xfrm>
           <a:prstGeom prst="ellipse">
             <a:avLst/>
           </a:prstGeom>
           <a:solidFill>
-            <a:srgbClr val="2E7D6B"/>
+            <a:srgbClr val="C8A86B"/>
           </a:solidFill>
           <a:ln>
             <a:noFill/>
@@ -5538,14 +6240,14 @@
       </p:sp>
       <p:sp>
         <p:nvSpPr>
-          <p:cNvPr id="7" name="TextBox 6"/>
+          <p:cNvPr id="18" name="TextBox 17"/>
           <p:cNvSpPr txBox="1"/>
           <p:nvPr/>
         </p:nvSpPr>
         <p:spPr>
           <a:xfrm>
-            <a:off x="804672" y="1591056"/>
-            <a:ext cx="457200" cy="384048"/>
+            <a:off x="841248" y="4663440"/>
+            <a:ext cx="502920" cy="365760"/>
           </a:xfrm>
           <a:prstGeom prst="rect">
             <a:avLst/>
@@ -5560,7 +6262,7 @@
           <a:p>
             <a:pPr algn="ctr"/>
             <a:r>
-              <a:rPr sz="1600" b="1">
+              <a:rPr sz="1800" b="1">
                 <a:solidFill>
                   <a:srgbClr val="FFFFFF"/>
                 </a:solidFill>
@@ -5568,21 +6270,21 @@
                 <a:ea typeface="微软雅黑"/>
                 <a:cs typeface="微软雅黑"/>
               </a:rPr>
-              <a:t>1</a:t>
-            </a:r>
-          </a:p>
-        </p:txBody>
-      </p:sp>
-      <p:sp>
-        <p:nvSpPr>
-          <p:cNvPr id="8" name="TextBox 7"/>
+              <a:t>3</a:t>
+            </a:r>
+          </a:p>
+        </p:txBody>
+      </p:sp>
+      <p:sp>
+        <p:nvSpPr>
+          <p:cNvPr id="19" name="TextBox 18"/>
           <p:cNvSpPr txBox="1"/>
           <p:nvPr/>
         </p:nvSpPr>
         <p:spPr>
           <a:xfrm>
-            <a:off x="1371600" y="1481328"/>
-            <a:ext cx="9997135" cy="484632"/>
+            <a:off x="1508760" y="4608576"/>
+            <a:ext cx="4267047" cy="457200"/>
           </a:xfrm>
           <a:prstGeom prst="rect">
             <a:avLst/>
@@ -5595,35 +6297,72 @@
           </a:bodyPr>
           <a:lstStyle/>
           <a:p>
+            <a:pPr algn="l"/>
+            <a:r>
+              <a:rPr sz="1650" b="1">
+                <a:solidFill>
+                  <a:srgbClr val="C8A86B"/>
+                </a:solidFill>
+                <a:latin typeface="楷体"/>
+                <a:ea typeface="楷体"/>
+                <a:cs typeface="楷体"/>
+              </a:rPr>
+              <a:t>文眼支架</a:t>
+            </a:r>
+          </a:p>
+        </p:txBody>
+      </p:sp>
+      <p:sp>
+        <p:nvSpPr>
+          <p:cNvPr id="20" name="TextBox 19"/>
+          <p:cNvSpPr txBox="1"/>
+          <p:nvPr/>
+        </p:nvSpPr>
+        <p:spPr>
+          <a:xfrm>
+            <a:off x="914400" y="5257800"/>
+            <a:ext cx="4724247" cy="822960"/>
+          </a:xfrm>
+          <a:prstGeom prst="rect">
+            <a:avLst/>
+          </a:prstGeom>
+          <a:noFill/>
+        </p:spPr>
+        <p:txBody>
+          <a:bodyPr wrap="square" anchor="t" lIns="0" rIns="0" tIns="0" bIns="0">
+            <a:spAutoFit/>
+          </a:bodyPr>
+          <a:lstStyle/>
+          <a:p>
             <a:pPr algn="l">
               <a:lnSpc>
-                <a:spcPct val="110000"/>
+                <a:spcPct val="150000"/>
               </a:lnSpc>
             </a:pPr>
             <a:r>
-              <a:rPr sz="1600" b="1">
+              <a:rPr sz="1300" b="0">
                 <a:solidFill>
                   <a:srgbClr val="1C2A33"/>
                 </a:solidFill>
-                <a:latin typeface="微软雅黑"/>
-                <a:ea typeface="微软雅黑"/>
-                <a:cs typeface="微软雅黑"/>
+                <a:latin typeface="楷体"/>
+                <a:ea typeface="楷体"/>
+                <a:cs typeface="楷体"/>
               </a:rPr>
-              <a:t>Step 1 导入</a:t>
-            </a:r>
-          </a:p>
-        </p:txBody>
-      </p:sp>
-      <p:sp>
-        <p:nvSpPr>
-          <p:cNvPr id="9" name="Rounded Rectangle 8"/>
+              <a:t>用「清/静/悲凉」三词贯串每幅画的解读。</a:t>
+            </a:r>
+          </a:p>
+        </p:txBody>
+      </p:sp>
+      <p:sp>
+        <p:nvSpPr>
+          <p:cNvPr id="21" name="Rounded Rectangle 20"/>
           <p:cNvSpPr/>
           <p:nvPr/>
         </p:nvSpPr>
         <p:spPr>
           <a:xfrm>
-            <a:off x="640080" y="2194560"/>
-            <a:ext cx="10911535" cy="685800"/>
+            <a:off x="6278727" y="4389120"/>
+            <a:ext cx="5272887" cy="1828800"/>
           </a:xfrm>
           <a:prstGeom prst="roundRect">
             <a:avLst/>
@@ -5631,9 +6370,9 @@
           <a:solidFill>
             <a:srgbClr val="FFFFFF"/>
           </a:solidFill>
-          <a:ln w="22860">
+          <a:ln w="20320">
             <a:solidFill>
-              <a:srgbClr val="2E7D6B"/>
+              <a:srgbClr val="6B6258"/>
             </a:solidFill>
           </a:ln>
           <a:effectLst/>
@@ -5662,20 +6401,20 @@
       </p:sp>
       <p:sp>
         <p:nvSpPr>
-          <p:cNvPr id="10" name="Oval 9"/>
+          <p:cNvPr id="22" name="Oval 21"/>
           <p:cNvSpPr/>
           <p:nvPr/>
         </p:nvSpPr>
         <p:spPr>
           <a:xfrm>
-            <a:off x="804672" y="2359152"/>
-            <a:ext cx="457200" cy="457200"/>
+            <a:off x="6479895" y="4590288"/>
+            <a:ext cx="502920" cy="502920"/>
           </a:xfrm>
           <a:prstGeom prst="ellipse">
             <a:avLst/>
           </a:prstGeom>
           <a:solidFill>
-            <a:srgbClr val="2E7D6B"/>
+            <a:srgbClr val="6B6258"/>
           </a:solidFill>
           <a:ln>
             <a:noFill/>
@@ -5706,14 +6445,14 @@
       </p:sp>
       <p:sp>
         <p:nvSpPr>
-          <p:cNvPr id="11" name="TextBox 10"/>
+          <p:cNvPr id="23" name="TextBox 22"/>
           <p:cNvSpPr txBox="1"/>
           <p:nvPr/>
         </p:nvSpPr>
         <p:spPr>
           <a:xfrm>
-            <a:off x="804672" y="2414016"/>
-            <a:ext cx="457200" cy="384048"/>
+            <a:off x="6479895" y="4663440"/>
+            <a:ext cx="502920" cy="365760"/>
           </a:xfrm>
           <a:prstGeom prst="rect">
             <a:avLst/>
@@ -5728,343 +6467,7 @@
           <a:p>
             <a:pPr algn="ctr"/>
             <a:r>
-              <a:rPr sz="1600" b="1">
-                <a:solidFill>
-                  <a:srgbClr val="FFFFFF"/>
-                </a:solidFill>
-                <a:latin typeface="微软雅黑"/>
-                <a:ea typeface="微软雅黑"/>
-                <a:cs typeface="微软雅黑"/>
-              </a:rPr>
-              <a:t>2</a:t>
-            </a:r>
-          </a:p>
-        </p:txBody>
-      </p:sp>
-      <p:sp>
-        <p:nvSpPr>
-          <p:cNvPr id="12" name="TextBox 11"/>
-          <p:cNvSpPr txBox="1"/>
-          <p:nvPr/>
-        </p:nvSpPr>
-        <p:spPr>
-          <a:xfrm>
-            <a:off x="1371600" y="2304288"/>
-            <a:ext cx="9997135" cy="484632"/>
-          </a:xfrm>
-          <a:prstGeom prst="rect">
-            <a:avLst/>
-          </a:prstGeom>
-          <a:noFill/>
-        </p:spPr>
-        <p:txBody>
-          <a:bodyPr wrap="square" anchor="t" lIns="0" rIns="0" tIns="0" bIns="0">
-            <a:spAutoFit/>
-          </a:bodyPr>
-          <a:lstStyle/>
-          <a:p>
-            <a:pPr algn="l">
-              <a:lnSpc>
-                <a:spcPct val="110000"/>
-              </a:lnSpc>
-            </a:pPr>
-            <a:r>
-              <a:rPr sz="1600" b="1">
-                <a:solidFill>
-                  <a:srgbClr val="1C2A33"/>
-                </a:solidFill>
-                <a:latin typeface="微软雅黑"/>
-                <a:ea typeface="微软雅黑"/>
-                <a:cs typeface="微软雅黑"/>
-              </a:rPr>
-              <a:t>Step 2 五幅画面</a:t>
-            </a:r>
-          </a:p>
-        </p:txBody>
-      </p:sp>
-      <p:sp>
-        <p:nvSpPr>
-          <p:cNvPr id="13" name="Rounded Rectangle 12"/>
-          <p:cNvSpPr/>
-          <p:nvPr/>
-        </p:nvSpPr>
-        <p:spPr>
-          <a:xfrm>
-            <a:off x="640080" y="3017520"/>
-            <a:ext cx="10911535" cy="685800"/>
-          </a:xfrm>
-          <a:prstGeom prst="roundRect">
-            <a:avLst/>
-          </a:prstGeom>
-          <a:solidFill>
-            <a:srgbClr val="FFFFFF"/>
-          </a:solidFill>
-          <a:ln w="22860">
-            <a:solidFill>
-              <a:srgbClr val="2E7D6B"/>
-            </a:solidFill>
-          </a:ln>
-          <a:effectLst/>
-        </p:spPr>
-        <p:style>
-          <a:lnRef idx="1">
-            <a:schemeClr val="accent1"/>
-          </a:lnRef>
-          <a:fillRef idx="3">
-            <a:schemeClr val="accent1"/>
-          </a:fillRef>
-          <a:effectRef idx="2">
-            <a:schemeClr val="accent1"/>
-          </a:effectRef>
-          <a:fontRef idx="minor">
-            <a:schemeClr val="lt1"/>
-          </a:fontRef>
-        </p:style>
-        <p:txBody>
-          <a:bodyPr rtlCol="0" anchor="ctr"/>
-          <a:lstStyle/>
-          <a:p>
-            <a:pPr algn="ctr"/>
-          </a:p>
-        </p:txBody>
-      </p:sp>
-      <p:sp>
-        <p:nvSpPr>
-          <p:cNvPr id="14" name="Oval 13"/>
-          <p:cNvSpPr/>
-          <p:nvPr/>
-        </p:nvSpPr>
-        <p:spPr>
-          <a:xfrm>
-            <a:off x="804672" y="3182112"/>
-            <a:ext cx="457200" cy="457200"/>
-          </a:xfrm>
-          <a:prstGeom prst="ellipse">
-            <a:avLst/>
-          </a:prstGeom>
-          <a:solidFill>
-            <a:srgbClr val="2E7D6B"/>
-          </a:solidFill>
-          <a:ln>
-            <a:noFill/>
-          </a:ln>
-          <a:effectLst/>
-        </p:spPr>
-        <p:style>
-          <a:lnRef idx="1">
-            <a:schemeClr val="accent1"/>
-          </a:lnRef>
-          <a:fillRef idx="3">
-            <a:schemeClr val="accent1"/>
-          </a:fillRef>
-          <a:effectRef idx="2">
-            <a:schemeClr val="accent1"/>
-          </a:effectRef>
-          <a:fontRef idx="minor">
-            <a:schemeClr val="lt1"/>
-          </a:fontRef>
-        </p:style>
-        <p:txBody>
-          <a:bodyPr rtlCol="0" anchor="ctr"/>
-          <a:lstStyle/>
-          <a:p>
-            <a:pPr algn="ctr"/>
-          </a:p>
-        </p:txBody>
-      </p:sp>
-      <p:sp>
-        <p:nvSpPr>
-          <p:cNvPr id="15" name="TextBox 14"/>
-          <p:cNvSpPr txBox="1"/>
-          <p:nvPr/>
-        </p:nvSpPr>
-        <p:spPr>
-          <a:xfrm>
-            <a:off x="804672" y="3236976"/>
-            <a:ext cx="457200" cy="384048"/>
-          </a:xfrm>
-          <a:prstGeom prst="rect">
-            <a:avLst/>
-          </a:prstGeom>
-          <a:noFill/>
-        </p:spPr>
-        <p:txBody>
-          <a:bodyPr wrap="square" anchor="t" lIns="0" rIns="0" tIns="0" bIns="0">
-            <a:spAutoFit/>
-          </a:bodyPr>
-          <a:lstStyle/>
-          <a:p>
-            <a:pPr algn="ctr"/>
-            <a:r>
-              <a:rPr sz="1600" b="1">
-                <a:solidFill>
-                  <a:srgbClr val="FFFFFF"/>
-                </a:solidFill>
-                <a:latin typeface="微软雅黑"/>
-                <a:ea typeface="微软雅黑"/>
-                <a:cs typeface="微软雅黑"/>
-              </a:rPr>
-              <a:t>3</a:t>
-            </a:r>
-          </a:p>
-        </p:txBody>
-      </p:sp>
-      <p:sp>
-        <p:nvSpPr>
-          <p:cNvPr id="16" name="TextBox 15"/>
-          <p:cNvSpPr txBox="1"/>
-          <p:nvPr/>
-        </p:nvSpPr>
-        <p:spPr>
-          <a:xfrm>
-            <a:off x="1371600" y="3127248"/>
-            <a:ext cx="9997135" cy="484632"/>
-          </a:xfrm>
-          <a:prstGeom prst="rect">
-            <a:avLst/>
-          </a:prstGeom>
-          <a:noFill/>
-        </p:spPr>
-        <p:txBody>
-          <a:bodyPr wrap="square" anchor="t" lIns="0" rIns="0" tIns="0" bIns="0">
-            <a:spAutoFit/>
-          </a:bodyPr>
-          <a:lstStyle/>
-          <a:p>
-            <a:pPr algn="l">
-              <a:lnSpc>
-                <a:spcPct val="110000"/>
-              </a:lnSpc>
-            </a:pPr>
-            <a:r>
-              <a:rPr sz="1400" b="1">
-                <a:solidFill>
-                  <a:srgbClr val="1C2A33"/>
-                </a:solidFill>
-                <a:latin typeface="微软雅黑"/>
-                <a:ea typeface="微软雅黑"/>
-                <a:cs typeface="微软雅黑"/>
-              </a:rPr>
-              <a:t>Step 3 清静悲凉解码</a:t>
-            </a:r>
-          </a:p>
-        </p:txBody>
-      </p:sp>
-      <p:sp>
-        <p:nvSpPr>
-          <p:cNvPr id="17" name="Rounded Rectangle 16"/>
-          <p:cNvSpPr/>
-          <p:nvPr/>
-        </p:nvSpPr>
-        <p:spPr>
-          <a:xfrm>
-            <a:off x="640080" y="3840480"/>
-            <a:ext cx="10911535" cy="685800"/>
-          </a:xfrm>
-          <a:prstGeom prst="roundRect">
-            <a:avLst/>
-          </a:prstGeom>
-          <a:solidFill>
-            <a:srgbClr val="FFFFFF"/>
-          </a:solidFill>
-          <a:ln w="22860">
-            <a:solidFill>
-              <a:srgbClr val="2E7D6B"/>
-            </a:solidFill>
-          </a:ln>
-          <a:effectLst/>
-        </p:spPr>
-        <p:style>
-          <a:lnRef idx="1">
-            <a:schemeClr val="accent1"/>
-          </a:lnRef>
-          <a:fillRef idx="3">
-            <a:schemeClr val="accent1"/>
-          </a:fillRef>
-          <a:effectRef idx="2">
-            <a:schemeClr val="accent1"/>
-          </a:effectRef>
-          <a:fontRef idx="minor">
-            <a:schemeClr val="lt1"/>
-          </a:fontRef>
-        </p:style>
-        <p:txBody>
-          <a:bodyPr rtlCol="0" anchor="ctr"/>
-          <a:lstStyle/>
-          <a:p>
-            <a:pPr algn="ctr"/>
-          </a:p>
-        </p:txBody>
-      </p:sp>
-      <p:sp>
-        <p:nvSpPr>
-          <p:cNvPr id="18" name="Oval 17"/>
-          <p:cNvSpPr/>
-          <p:nvPr/>
-        </p:nvSpPr>
-        <p:spPr>
-          <a:xfrm>
-            <a:off x="804672" y="4005072"/>
-            <a:ext cx="457200" cy="457200"/>
-          </a:xfrm>
-          <a:prstGeom prst="ellipse">
-            <a:avLst/>
-          </a:prstGeom>
-          <a:solidFill>
-            <a:srgbClr val="2E7D6B"/>
-          </a:solidFill>
-          <a:ln>
-            <a:noFill/>
-          </a:ln>
-          <a:effectLst/>
-        </p:spPr>
-        <p:style>
-          <a:lnRef idx="1">
-            <a:schemeClr val="accent1"/>
-          </a:lnRef>
-          <a:fillRef idx="3">
-            <a:schemeClr val="accent1"/>
-          </a:fillRef>
-          <a:effectRef idx="2">
-            <a:schemeClr val="accent1"/>
-          </a:effectRef>
-          <a:fontRef idx="minor">
-            <a:schemeClr val="lt1"/>
-          </a:fontRef>
-        </p:style>
-        <p:txBody>
-          <a:bodyPr rtlCol="0" anchor="ctr"/>
-          <a:lstStyle/>
-          <a:p>
-            <a:pPr algn="ctr"/>
-          </a:p>
-        </p:txBody>
-      </p:sp>
-      <p:sp>
-        <p:nvSpPr>
-          <p:cNvPr id="19" name="TextBox 18"/>
-          <p:cNvSpPr txBox="1"/>
-          <p:nvPr/>
-        </p:nvSpPr>
-        <p:spPr>
-          <a:xfrm>
-            <a:off x="804672" y="4059936"/>
-            <a:ext cx="457200" cy="384048"/>
-          </a:xfrm>
-          <a:prstGeom prst="rect">
-            <a:avLst/>
-          </a:prstGeom>
-          <a:noFill/>
-        </p:spPr>
-        <p:txBody>
-          <a:bodyPr wrap="square" anchor="t" lIns="0" rIns="0" tIns="0" bIns="0">
-            <a:spAutoFit/>
-          </a:bodyPr>
-          <a:lstStyle/>
-          <a:p>
-            <a:pPr algn="ctr"/>
-            <a:r>
-              <a:rPr sz="1600" b="1">
+              <a:rPr sz="1800" b="1">
                 <a:solidFill>
                   <a:srgbClr val="FFFFFF"/>
                 </a:solidFill>
@@ -6079,14 +6482,14 @@
       </p:sp>
       <p:sp>
         <p:nvSpPr>
-          <p:cNvPr id="20" name="TextBox 19"/>
+          <p:cNvPr id="24" name="TextBox 23"/>
           <p:cNvSpPr txBox="1"/>
           <p:nvPr/>
         </p:nvSpPr>
         <p:spPr>
           <a:xfrm>
-            <a:off x="1371600" y="3950208"/>
-            <a:ext cx="9997135" cy="484632"/>
+            <a:off x="7147407" y="4608576"/>
+            <a:ext cx="4267047" cy="457200"/>
           </a:xfrm>
           <a:prstGeom prst="rect">
             <a:avLst/>
@@ -6099,125 +6502,31 @@
           </a:bodyPr>
           <a:lstStyle/>
           <a:p>
-            <a:pPr algn="l">
-              <a:lnSpc>
-                <a:spcPct val="110000"/>
-              </a:lnSpc>
-            </a:pPr>
-            <a:r>
-              <a:rPr sz="1600" b="1">
-                <a:solidFill>
-                  <a:srgbClr val="1C2A33"/>
-                </a:solidFill>
-                <a:latin typeface="微软雅黑"/>
-                <a:ea typeface="微软雅黑"/>
-                <a:cs typeface="微软雅黑"/>
+            <a:pPr algn="l"/>
+            <a:r>
+              <a:rPr sz="1650" b="1">
+                <a:solidFill>
+                  <a:srgbClr val="6B6258"/>
+                </a:solidFill>
+                <a:latin typeface="楷体"/>
+                <a:ea typeface="楷体"/>
+                <a:cs typeface="楷体"/>
               </a:rPr>
-              <a:t>Step 4 形散神聚</a:t>
-            </a:r>
-          </a:p>
-        </p:txBody>
-      </p:sp>
-      <p:sp>
-        <p:nvSpPr>
-          <p:cNvPr id="21" name="Rounded Rectangle 20"/>
-          <p:cNvSpPr/>
-          <p:nvPr/>
-        </p:nvSpPr>
-        <p:spPr>
-          <a:xfrm>
-            <a:off x="640080" y="4663440"/>
-            <a:ext cx="10911535" cy="685800"/>
-          </a:xfrm>
-          <a:prstGeom prst="roundRect">
-            <a:avLst/>
-          </a:prstGeom>
-          <a:solidFill>
-            <a:srgbClr val="FFFFFF"/>
-          </a:solidFill>
-          <a:ln w="22860">
-            <a:solidFill>
-              <a:srgbClr val="2E7D6B"/>
-            </a:solidFill>
-          </a:ln>
-          <a:effectLst/>
-        </p:spPr>
-        <p:style>
-          <a:lnRef idx="1">
-            <a:schemeClr val="accent1"/>
-          </a:lnRef>
-          <a:fillRef idx="3">
-            <a:schemeClr val="accent1"/>
-          </a:fillRef>
-          <a:effectRef idx="2">
-            <a:schemeClr val="accent1"/>
-          </a:effectRef>
-          <a:fontRef idx="minor">
-            <a:schemeClr val="lt1"/>
-          </a:fontRef>
-        </p:style>
-        <p:txBody>
-          <a:bodyPr rtlCol="0" anchor="ctr"/>
-          <a:lstStyle/>
-          <a:p>
-            <a:pPr algn="ctr"/>
-          </a:p>
-        </p:txBody>
-      </p:sp>
-      <p:sp>
-        <p:nvSpPr>
-          <p:cNvPr id="22" name="Oval 21"/>
-          <p:cNvSpPr/>
-          <p:nvPr/>
-        </p:nvSpPr>
-        <p:spPr>
-          <a:xfrm>
-            <a:off x="804672" y="4828032"/>
-            <a:ext cx="457200" cy="457200"/>
-          </a:xfrm>
-          <a:prstGeom prst="ellipse">
-            <a:avLst/>
-          </a:prstGeom>
-          <a:solidFill>
-            <a:srgbClr val="2E7D6B"/>
-          </a:solidFill>
-          <a:ln>
-            <a:noFill/>
-          </a:ln>
-          <a:effectLst/>
-        </p:spPr>
-        <p:style>
-          <a:lnRef idx="1">
-            <a:schemeClr val="accent1"/>
-          </a:lnRef>
-          <a:fillRef idx="3">
-            <a:schemeClr val="accent1"/>
-          </a:fillRef>
-          <a:effectRef idx="2">
-            <a:schemeClr val="accent1"/>
-          </a:effectRef>
-          <a:fontRef idx="minor">
-            <a:schemeClr val="lt1"/>
-          </a:fontRef>
-        </p:style>
-        <p:txBody>
-          <a:bodyPr rtlCol="0" anchor="ctr"/>
-          <a:lstStyle/>
-          <a:p>
-            <a:pPr algn="ctr"/>
-          </a:p>
-        </p:txBody>
-      </p:sp>
-      <p:sp>
-        <p:nvSpPr>
-          <p:cNvPr id="23" name="TextBox 22"/>
+              <a:t>南北比较</a:t>
+            </a:r>
+          </a:p>
+        </p:txBody>
+      </p:sp>
+      <p:sp>
+        <p:nvSpPr>
+          <p:cNvPr id="25" name="TextBox 24"/>
           <p:cNvSpPr txBox="1"/>
           <p:nvPr/>
         </p:nvSpPr>
         <p:spPr>
           <a:xfrm>
-            <a:off x="804672" y="4882896"/>
-            <a:ext cx="457200" cy="384048"/>
+            <a:off x="6553047" y="5257800"/>
+            <a:ext cx="4724247" cy="822960"/>
           </a:xfrm>
           <a:prstGeom prst="rect">
             <a:avLst/>
@@ -6230,233 +6539,28 @@
           </a:bodyPr>
           <a:lstStyle/>
           <a:p>
-            <a:pPr algn="ctr"/>
-            <a:r>
-              <a:rPr sz="1600" b="1">
-                <a:solidFill>
-                  <a:srgbClr val="FFFFFF"/>
-                </a:solidFill>
-                <a:latin typeface="微软雅黑"/>
-                <a:ea typeface="微软雅黑"/>
-                <a:cs typeface="微软雅黑"/>
-              </a:rPr>
-              <a:t>5</a:t>
-            </a:r>
-          </a:p>
-        </p:txBody>
-      </p:sp>
-      <p:sp>
-        <p:nvSpPr>
-          <p:cNvPr id="24" name="TextBox 23"/>
-          <p:cNvSpPr txBox="1"/>
-          <p:nvPr/>
-        </p:nvSpPr>
-        <p:spPr>
-          <a:xfrm>
-            <a:off x="1371600" y="4773168"/>
-            <a:ext cx="9997135" cy="484632"/>
-          </a:xfrm>
-          <a:prstGeom prst="rect">
-            <a:avLst/>
-          </a:prstGeom>
-          <a:noFill/>
-        </p:spPr>
-        <p:txBody>
-          <a:bodyPr wrap="square" anchor="t" lIns="0" rIns="0" tIns="0" bIns="0">
-            <a:spAutoFit/>
-          </a:bodyPr>
-          <a:lstStyle/>
-          <a:p>
             <a:pPr algn="l">
               <a:lnSpc>
-                <a:spcPct val="110000"/>
+                <a:spcPct val="150000"/>
               </a:lnSpc>
             </a:pPr>
             <a:r>
-              <a:rPr sz="1600" b="1">
+              <a:rPr sz="1300" b="0">
                 <a:solidFill>
                   <a:srgbClr val="1C2A33"/>
                 </a:solidFill>
-                <a:latin typeface="微软雅黑"/>
-                <a:ea typeface="微软雅黑"/>
-                <a:cs typeface="微软雅黑"/>
+                <a:latin typeface="楷体"/>
+                <a:ea typeface="楷体"/>
+                <a:cs typeface="楷体"/>
               </a:rPr>
-              <a:t>Step 5 南北秋比较</a:t>
-            </a:r>
-          </a:p>
-        </p:txBody>
-      </p:sp>
-      <p:sp>
-        <p:nvSpPr>
-          <p:cNvPr id="25" name="Rounded Rectangle 24"/>
-          <p:cNvSpPr/>
-          <p:nvPr/>
-        </p:nvSpPr>
-        <p:spPr>
-          <a:xfrm>
-            <a:off x="640080" y="5486400"/>
-            <a:ext cx="10911535" cy="685800"/>
-          </a:xfrm>
-          <a:prstGeom prst="roundRect">
-            <a:avLst/>
-          </a:prstGeom>
-          <a:solidFill>
-            <a:srgbClr val="FFFFFF"/>
-          </a:solidFill>
-          <a:ln w="22860">
-            <a:solidFill>
-              <a:srgbClr val="2E7D6B"/>
-            </a:solidFill>
-          </a:ln>
-          <a:effectLst/>
-        </p:spPr>
-        <p:style>
-          <a:lnRef idx="1">
-            <a:schemeClr val="accent1"/>
-          </a:lnRef>
-          <a:fillRef idx="3">
-            <a:schemeClr val="accent1"/>
-          </a:fillRef>
-          <a:effectRef idx="2">
-            <a:schemeClr val="accent1"/>
-          </a:effectRef>
-          <a:fontRef idx="minor">
-            <a:schemeClr val="lt1"/>
-          </a:fontRef>
-        </p:style>
-        <p:txBody>
-          <a:bodyPr rtlCol="0" anchor="ctr"/>
-          <a:lstStyle/>
-          <a:p>
-            <a:pPr algn="ctr"/>
-          </a:p>
-        </p:txBody>
-      </p:sp>
-      <p:sp>
-        <p:nvSpPr>
-          <p:cNvPr id="26" name="Oval 25"/>
-          <p:cNvSpPr/>
-          <p:nvPr/>
-        </p:nvSpPr>
-        <p:spPr>
-          <a:xfrm>
-            <a:off x="804672" y="5650992"/>
-            <a:ext cx="457200" cy="457200"/>
-          </a:xfrm>
-          <a:prstGeom prst="ellipse">
-            <a:avLst/>
-          </a:prstGeom>
-          <a:solidFill>
-            <a:srgbClr val="2E7D6B"/>
-          </a:solidFill>
-          <a:ln>
-            <a:noFill/>
-          </a:ln>
-          <a:effectLst/>
-        </p:spPr>
-        <p:style>
-          <a:lnRef idx="1">
-            <a:schemeClr val="accent1"/>
-          </a:lnRef>
-          <a:fillRef idx="3">
-            <a:schemeClr val="accent1"/>
-          </a:fillRef>
-          <a:effectRef idx="2">
-            <a:schemeClr val="accent1"/>
-          </a:effectRef>
-          <a:fontRef idx="minor">
-            <a:schemeClr val="lt1"/>
-          </a:fontRef>
-        </p:style>
-        <p:txBody>
-          <a:bodyPr rtlCol="0" anchor="ctr"/>
-          <a:lstStyle/>
-          <a:p>
-            <a:pPr algn="ctr"/>
-          </a:p>
-        </p:txBody>
-      </p:sp>
-      <p:sp>
-        <p:nvSpPr>
-          <p:cNvPr id="27" name="TextBox 26"/>
-          <p:cNvSpPr txBox="1"/>
-          <p:nvPr/>
-        </p:nvSpPr>
-        <p:spPr>
-          <a:xfrm>
-            <a:off x="804672" y="5705856"/>
-            <a:ext cx="457200" cy="384048"/>
-          </a:xfrm>
-          <a:prstGeom prst="rect">
-            <a:avLst/>
-          </a:prstGeom>
-          <a:noFill/>
-        </p:spPr>
-        <p:txBody>
-          <a:bodyPr wrap="square" anchor="t" lIns="0" rIns="0" tIns="0" bIns="0">
-            <a:spAutoFit/>
-          </a:bodyPr>
-          <a:lstStyle/>
-          <a:p>
-            <a:pPr algn="ctr"/>
-            <a:r>
-              <a:rPr sz="1600" b="1">
-                <a:solidFill>
-                  <a:srgbClr val="FFFFFF"/>
-                </a:solidFill>
-                <a:latin typeface="微软雅黑"/>
-                <a:ea typeface="微软雅黑"/>
-                <a:cs typeface="微软雅黑"/>
-              </a:rPr>
-              <a:t>6</a:t>
-            </a:r>
-          </a:p>
-        </p:txBody>
-      </p:sp>
-      <p:sp>
-        <p:nvSpPr>
-          <p:cNvPr id="28" name="TextBox 27"/>
-          <p:cNvSpPr txBox="1"/>
-          <p:nvPr/>
-        </p:nvSpPr>
-        <p:spPr>
-          <a:xfrm>
-            <a:off x="1371600" y="5596128"/>
-            <a:ext cx="9997135" cy="484632"/>
-          </a:xfrm>
-          <a:prstGeom prst="rect">
-            <a:avLst/>
-          </a:prstGeom>
-          <a:noFill/>
-        </p:spPr>
-        <p:txBody>
-          <a:bodyPr wrap="square" anchor="t" lIns="0" rIns="0" tIns="0" bIns="0">
-            <a:spAutoFit/>
-          </a:bodyPr>
-          <a:lstStyle/>
-          <a:p>
-            <a:pPr algn="l">
-              <a:lnSpc>
-                <a:spcPct val="110000"/>
-              </a:lnSpc>
-            </a:pPr>
-            <a:r>
-              <a:rPr sz="1600" b="1">
-                <a:solidFill>
-                  <a:srgbClr val="1C2A33"/>
-                </a:solidFill>
-                <a:latin typeface="微软雅黑"/>
-                <a:ea typeface="微软雅黑"/>
-                <a:cs typeface="微软雅黑"/>
-              </a:rPr>
-              <a:t>Step 6 小结+作业</a:t>
-            </a:r>
-          </a:p>
-        </p:txBody>
-      </p:sp>
-      <p:sp>
-        <p:nvSpPr>
-          <p:cNvPr id="29" name="TextBox 28"/>
+              <a:t>为何写北国也提南国？反衬北国秋味更浓。</a:t>
+            </a:r>
+          </a:p>
+        </p:txBody>
+      </p:sp>
+      <p:sp>
+        <p:nvSpPr>
+          <p:cNvPr id="26" name="TextBox 25"/>
           <p:cNvSpPr txBox="1"/>
           <p:nvPr/>
         </p:nvSpPr>
@@ -6589,7 +6693,7 @@
                 <a:ea typeface="微软雅黑"/>
                 <a:cs typeface="微软雅黑"/>
               </a:rPr>
-              <a:t>易混易错</a:t>
+              <a:t>难点</a:t>
             </a:r>
           </a:p>
         </p:txBody>
@@ -6640,14 +6744,51 @@
       </p:sp>
       <p:sp>
         <p:nvSpPr>
-          <p:cNvPr id="5" name="Rounded Rectangle 4"/>
+          <p:cNvPr id="5" name="TextBox 4"/>
+          <p:cNvSpPr txBox="1"/>
+          <p:nvPr/>
+        </p:nvSpPr>
+        <p:spPr>
+          <a:xfrm>
+            <a:off x="640080" y="1280160"/>
+            <a:ext cx="10515600" cy="548640"/>
+          </a:xfrm>
+          <a:prstGeom prst="rect">
+            <a:avLst/>
+          </a:prstGeom>
+          <a:noFill/>
+        </p:spPr>
+        <p:txBody>
+          <a:bodyPr wrap="square" anchor="t" lIns="0" rIns="0" tIns="0" bIns="0">
+            <a:spAutoFit/>
+          </a:bodyPr>
+          <a:lstStyle/>
+          <a:p>
+            <a:pPr algn="l"/>
+            <a:r>
+              <a:rPr sz="2800" b="1">
+                <a:solidFill>
+                  <a:srgbClr val="1C2A33"/>
+                </a:solidFill>
+                <a:latin typeface="楷体"/>
+                <a:ea typeface="楷体"/>
+                <a:cs typeface="楷体"/>
+              </a:rPr>
+              <a:t>难点突破</a:t>
+            </a:r>
+          </a:p>
+        </p:txBody>
+      </p:sp>
+      <p:sp>
+        <p:nvSpPr>
+          <p:cNvPr id="6" name="Rounded Rectangle 5"/>
           <p:cNvSpPr/>
           <p:nvPr/>
         </p:nvSpPr>
         <p:spPr>
           <a:xfrm>
-            <a:off x="640080" y="1417320"/>
-            <a:ext cx="5349240" cy="2057400"/>
+            <a:off x="640080" y="2194560"/>
+            <a:ext cx="3393338" cy="3840480"/>
           </a:xfrm>
           <a:prstGeom prst="roundRect">
             <a:avLst/>
@@ -6655,7 +6796,7 @@
           <a:solidFill>
             <a:srgbClr val="FFFFFF"/>
           </a:solidFill>
-          <a:ln w="22860">
+          <a:ln w="20320">
             <a:solidFill>
               <a:srgbClr val="B23A2A"/>
             </a:solidFill>
@@ -6686,14 +6827,14 @@
       </p:sp>
       <p:sp>
         <p:nvSpPr>
-          <p:cNvPr id="6" name="Oval 5"/>
+          <p:cNvPr id="7" name="Oval 6"/>
           <p:cNvSpPr/>
           <p:nvPr/>
         </p:nvSpPr>
         <p:spPr>
           <a:xfrm>
-            <a:off x="804672" y="1581912"/>
-            <a:ext cx="457200" cy="457200"/>
+            <a:off x="868680" y="2423160"/>
+            <a:ext cx="548640" cy="548640"/>
           </a:xfrm>
           <a:prstGeom prst="ellipse">
             <a:avLst/>
@@ -6730,14 +6871,14 @@
       </p:sp>
       <p:sp>
         <p:nvSpPr>
-          <p:cNvPr id="7" name="TextBox 6"/>
+          <p:cNvPr id="8" name="TextBox 7"/>
           <p:cNvSpPr txBox="1"/>
           <p:nvPr/>
         </p:nvSpPr>
         <p:spPr>
           <a:xfrm>
-            <a:off x="804672" y="1636776"/>
-            <a:ext cx="457200" cy="384048"/>
+            <a:off x="868680" y="2496312"/>
+            <a:ext cx="548640" cy="411480"/>
           </a:xfrm>
           <a:prstGeom prst="rect">
             <a:avLst/>
@@ -6752,7 +6893,7 @@
           <a:p>
             <a:pPr algn="ctr"/>
             <a:r>
-              <a:rPr sz="1600" b="1">
+              <a:rPr sz="2000" b="1">
                 <a:solidFill>
                   <a:srgbClr val="FFFFFF"/>
                 </a:solidFill>
@@ -6760,21 +6901,21 @@
                 <a:ea typeface="微软雅黑"/>
                 <a:cs typeface="微软雅黑"/>
               </a:rPr>
-              <a:t>!</a:t>
-            </a:r>
-          </a:p>
-        </p:txBody>
-      </p:sp>
-      <p:sp>
-        <p:nvSpPr>
-          <p:cNvPr id="8" name="TextBox 7"/>
+              <a:t>1</a:t>
+            </a:r>
+          </a:p>
+        </p:txBody>
+      </p:sp>
+      <p:sp>
+        <p:nvSpPr>
+          <p:cNvPr id="9" name="TextBox 8"/>
           <p:cNvSpPr txBox="1"/>
           <p:nvPr/>
         </p:nvSpPr>
         <p:spPr>
           <a:xfrm>
-            <a:off x="1371600" y="1527048"/>
-            <a:ext cx="4434840" cy="457200"/>
+            <a:off x="1600200" y="2441448"/>
+            <a:ext cx="2250338" cy="640080"/>
           </a:xfrm>
           <a:prstGeom prst="rect">
             <a:avLst/>
@@ -6789,52 +6930,11 @@
           <a:p>
             <a:pPr algn="l">
               <a:lnSpc>
-                <a:spcPct val="110000"/>
+                <a:spcPct val="125000"/>
               </a:lnSpc>
             </a:pPr>
             <a:r>
               <a:rPr sz="1600" b="1">
-                <a:solidFill>
-                  <a:srgbClr val="1C2A33"/>
-                </a:solidFill>
-                <a:latin typeface="微软雅黑"/>
-                <a:ea typeface="微软雅黑"/>
-                <a:cs typeface="微软雅黑"/>
-              </a:rPr>
-              <a:t/>
-            </a:r>
-          </a:p>
-        </p:txBody>
-      </p:sp>
-      <p:sp>
-        <p:nvSpPr>
-          <p:cNvPr id="9" name="TextBox 8"/>
-          <p:cNvSpPr txBox="1"/>
-          <p:nvPr/>
-        </p:nvSpPr>
-        <p:spPr>
-          <a:xfrm>
-            <a:off x="1371600" y="1965960"/>
-            <a:ext cx="4434840" cy="1417320"/>
-          </a:xfrm>
-          <a:prstGeom prst="rect">
-            <a:avLst/>
-          </a:prstGeom>
-          <a:noFill/>
-        </p:spPr>
-        <p:txBody>
-          <a:bodyPr wrap="square" anchor="t" lIns="0" rIns="0" tIns="0" bIns="0">
-            <a:spAutoFit/>
-          </a:bodyPr>
-          <a:lstStyle/>
-          <a:p>
-            <a:pPr algn="l">
-              <a:lnSpc>
-                <a:spcPct val="128000"/>
-              </a:lnSpc>
-            </a:pPr>
-            <a:r>
-              <a:rPr sz="1400" b="0">
                 <a:solidFill>
                   <a:srgbClr val="1C2A33"/>
                 </a:solidFill>
@@ -6842,21 +6942,62 @@
                 <a:ea typeface="楷体"/>
                 <a:cs typeface="楷体"/>
               </a:rPr>
-              <a:t>① 悲凉之美。原因：学生喜「热闹美」，难赏寂寥，需引导「悲凉即深沉」。</a:t>
-            </a:r>
-          </a:p>
-        </p:txBody>
-      </p:sp>
-      <p:sp>
-        <p:nvSpPr>
-          <p:cNvPr id="10" name="Rounded Rectangle 9"/>
+              <a:t>赏不出悲凉</a:t>
+            </a:r>
+          </a:p>
+        </p:txBody>
+      </p:sp>
+      <p:sp>
+        <p:nvSpPr>
+          <p:cNvPr id="10" name="TextBox 9"/>
+          <p:cNvSpPr txBox="1"/>
+          <p:nvPr/>
+        </p:nvSpPr>
+        <p:spPr>
+          <a:xfrm>
+            <a:off x="914400" y="3200400"/>
+            <a:ext cx="2844698" cy="2697480"/>
+          </a:xfrm>
+          <a:prstGeom prst="rect">
+            <a:avLst/>
+          </a:prstGeom>
+          <a:noFill/>
+        </p:spPr>
+        <p:txBody>
+          <a:bodyPr wrap="square" anchor="t" lIns="0" rIns="0" tIns="0" bIns="0">
+            <a:spAutoFit/>
+          </a:bodyPr>
+          <a:lstStyle/>
+          <a:p>
+            <a:pPr algn="l">
+              <a:lnSpc>
+                <a:spcPct val="155000"/>
+              </a:lnSpc>
+            </a:pPr>
+            <a:r>
+              <a:rPr sz="1350" b="0">
+                <a:solidFill>
+                  <a:srgbClr val="1C2A33"/>
+                </a:solidFill>
+                <a:latin typeface="楷体"/>
+                <a:ea typeface="楷体"/>
+                <a:cs typeface="楷体"/>
+              </a:rPr>
+              <a:t>悲凉也是一种深美：寂寥里藏着对故都的眷恋。</a:t>
+            </a:r>
+          </a:p>
+        </p:txBody>
+      </p:sp>
+      <p:sp>
+        <p:nvSpPr>
+          <p:cNvPr id="11" name="Rounded Rectangle 10"/>
           <p:cNvSpPr/>
           <p:nvPr/>
         </p:nvSpPr>
         <p:spPr>
           <a:xfrm>
-            <a:off x="6263640" y="1417320"/>
-            <a:ext cx="5349240" cy="2057400"/>
+            <a:off x="4399178" y="2194560"/>
+            <a:ext cx="3393338" cy="3840480"/>
           </a:xfrm>
           <a:prstGeom prst="roundRect">
             <a:avLst/>
@@ -6864,9 +7005,9 @@
           <a:solidFill>
             <a:srgbClr val="FFFFFF"/>
           </a:solidFill>
-          <a:ln w="22860">
+          <a:ln w="20320">
             <a:solidFill>
-              <a:srgbClr val="B23A2A"/>
+              <a:srgbClr val="2E7D6B"/>
             </a:solidFill>
           </a:ln>
           <a:effectLst/>
@@ -6895,20 +7036,20 @@
       </p:sp>
       <p:sp>
         <p:nvSpPr>
-          <p:cNvPr id="11" name="Oval 10"/>
+          <p:cNvPr id="12" name="Oval 11"/>
           <p:cNvSpPr/>
           <p:nvPr/>
         </p:nvSpPr>
         <p:spPr>
           <a:xfrm>
-            <a:off x="6428232" y="1581912"/>
-            <a:ext cx="457200" cy="457200"/>
+            <a:off x="4627778" y="2423160"/>
+            <a:ext cx="548640" cy="548640"/>
           </a:xfrm>
           <a:prstGeom prst="ellipse">
             <a:avLst/>
           </a:prstGeom>
           <a:solidFill>
-            <a:srgbClr val="B23A2A"/>
+            <a:srgbClr val="2E7D6B"/>
           </a:solidFill>
           <a:ln>
             <a:noFill/>
@@ -6939,14 +7080,14 @@
       </p:sp>
       <p:sp>
         <p:nvSpPr>
-          <p:cNvPr id="12" name="TextBox 11"/>
+          <p:cNvPr id="13" name="TextBox 12"/>
           <p:cNvSpPr txBox="1"/>
           <p:nvPr/>
         </p:nvSpPr>
         <p:spPr>
           <a:xfrm>
-            <a:off x="6428232" y="1636776"/>
-            <a:ext cx="457200" cy="384048"/>
+            <a:off x="4627778" y="2496312"/>
+            <a:ext cx="548640" cy="411480"/>
           </a:xfrm>
           <a:prstGeom prst="rect">
             <a:avLst/>
@@ -6961,7 +7102,7 @@
           <a:p>
             <a:pPr algn="ctr"/>
             <a:r>
-              <a:rPr sz="1600" b="1">
+              <a:rPr sz="2000" b="1">
                 <a:solidFill>
                   <a:srgbClr val="FFFFFF"/>
                 </a:solidFill>
@@ -6969,21 +7110,21 @@
                 <a:ea typeface="微软雅黑"/>
                 <a:cs typeface="微软雅黑"/>
               </a:rPr>
-              <a:t>!</a:t>
-            </a:r>
-          </a:p>
-        </p:txBody>
-      </p:sp>
-      <p:sp>
-        <p:nvSpPr>
-          <p:cNvPr id="13" name="TextBox 12"/>
+              <a:t>2</a:t>
+            </a:r>
+          </a:p>
+        </p:txBody>
+      </p:sp>
+      <p:sp>
+        <p:nvSpPr>
+          <p:cNvPr id="14" name="TextBox 13"/>
           <p:cNvSpPr txBox="1"/>
           <p:nvPr/>
         </p:nvSpPr>
         <p:spPr>
           <a:xfrm>
-            <a:off x="6995160" y="1527048"/>
-            <a:ext cx="4434840" cy="457200"/>
+            <a:off x="5359298" y="2441448"/>
+            <a:ext cx="2250338" cy="640080"/>
           </a:xfrm>
           <a:prstGeom prst="rect">
             <a:avLst/>
@@ -6998,52 +7139,11 @@
           <a:p>
             <a:pPr algn="l">
               <a:lnSpc>
-                <a:spcPct val="110000"/>
+                <a:spcPct val="125000"/>
               </a:lnSpc>
             </a:pPr>
             <a:r>
               <a:rPr sz="1600" b="1">
-                <a:solidFill>
-                  <a:srgbClr val="1C2A33"/>
-                </a:solidFill>
-                <a:latin typeface="微软雅黑"/>
-                <a:ea typeface="微软雅黑"/>
-                <a:cs typeface="微软雅黑"/>
-              </a:rPr>
-              <a:t/>
-            </a:r>
-          </a:p>
-        </p:txBody>
-      </p:sp>
-      <p:sp>
-        <p:nvSpPr>
-          <p:cNvPr id="14" name="TextBox 13"/>
-          <p:cNvSpPr txBox="1"/>
-          <p:nvPr/>
-        </p:nvSpPr>
-        <p:spPr>
-          <a:xfrm>
-            <a:off x="6995160" y="1965960"/>
-            <a:ext cx="4434840" cy="1417320"/>
-          </a:xfrm>
-          <a:prstGeom prst="rect">
-            <a:avLst/>
-          </a:prstGeom>
-          <a:noFill/>
-        </p:spPr>
-        <p:txBody>
-          <a:bodyPr wrap="square" anchor="t" lIns="0" rIns="0" tIns="0" bIns="0">
-            <a:spAutoFit/>
-          </a:bodyPr>
-          <a:lstStyle/>
-          <a:p>
-            <a:pPr algn="l">
-              <a:lnSpc>
-                <a:spcPct val="128000"/>
-              </a:lnSpc>
-            </a:pPr>
-            <a:r>
-              <a:rPr sz="1400" b="0">
                 <a:solidFill>
                   <a:srgbClr val="1C2A33"/>
                 </a:solidFill>
@@ -7051,21 +7151,62 @@
                 <a:ea typeface="楷体"/>
                 <a:cs typeface="楷体"/>
               </a:rPr>
-              <a:t>② 形散神聚。原因：易只见散不见聚，需点明文眼统摄。</a:t>
-            </a:r>
-          </a:p>
-        </p:txBody>
-      </p:sp>
-      <p:sp>
-        <p:nvSpPr>
-          <p:cNvPr id="15" name="Rounded Rectangle 14"/>
+              <a:t>只见散不见聚</a:t>
+            </a:r>
+          </a:p>
+        </p:txBody>
+      </p:sp>
+      <p:sp>
+        <p:nvSpPr>
+          <p:cNvPr id="15" name="TextBox 14"/>
+          <p:cNvSpPr txBox="1"/>
+          <p:nvPr/>
+        </p:nvSpPr>
+        <p:spPr>
+          <a:xfrm>
+            <a:off x="4673498" y="3200400"/>
+            <a:ext cx="2844698" cy="2697480"/>
+          </a:xfrm>
+          <a:prstGeom prst="rect">
+            <a:avLst/>
+          </a:prstGeom>
+          <a:noFill/>
+        </p:spPr>
+        <p:txBody>
+          <a:bodyPr wrap="square" anchor="t" lIns="0" rIns="0" tIns="0" bIns="0">
+            <a:spAutoFit/>
+          </a:bodyPr>
+          <a:lstStyle/>
+          <a:p>
+            <a:pPr algn="l">
+              <a:lnSpc>
+                <a:spcPct val="155000"/>
+              </a:lnSpc>
+            </a:pPr>
+            <a:r>
+              <a:rPr sz="1350" b="0">
+                <a:solidFill>
+                  <a:srgbClr val="1C2A33"/>
+                </a:solidFill>
+                <a:latin typeface="楷体"/>
+                <a:ea typeface="楷体"/>
+                <a:cs typeface="楷体"/>
+              </a:rPr>
+              <a:t>五幅看似散，都服务「悲凉」——这就是神聚。</a:t>
+            </a:r>
+          </a:p>
+        </p:txBody>
+      </p:sp>
+      <p:sp>
+        <p:nvSpPr>
+          <p:cNvPr id="16" name="Rounded Rectangle 15"/>
           <p:cNvSpPr/>
           <p:nvPr/>
         </p:nvSpPr>
         <p:spPr>
           <a:xfrm>
-            <a:off x="640080" y="3703320"/>
-            <a:ext cx="5349240" cy="2057400"/>
+            <a:off x="8158276" y="2194560"/>
+            <a:ext cx="3393338" cy="3840480"/>
           </a:xfrm>
           <a:prstGeom prst="roundRect">
             <a:avLst/>
@@ -7073,9 +7214,9 @@
           <a:solidFill>
             <a:srgbClr val="FFFFFF"/>
           </a:solidFill>
-          <a:ln w="22860">
+          <a:ln w="20320">
             <a:solidFill>
-              <a:srgbClr val="B23A2A"/>
+              <a:srgbClr val="C8A86B"/>
             </a:solidFill>
           </a:ln>
           <a:effectLst/>
@@ -7104,20 +7245,20 @@
       </p:sp>
       <p:sp>
         <p:nvSpPr>
-          <p:cNvPr id="16" name="Oval 15"/>
+          <p:cNvPr id="17" name="Oval 16"/>
           <p:cNvSpPr/>
           <p:nvPr/>
         </p:nvSpPr>
         <p:spPr>
           <a:xfrm>
-            <a:off x="804672" y="3867912"/>
-            <a:ext cx="457200" cy="457200"/>
+            <a:off x="8386876" y="2423160"/>
+            <a:ext cx="548640" cy="548640"/>
           </a:xfrm>
           <a:prstGeom prst="ellipse">
             <a:avLst/>
           </a:prstGeom>
           <a:solidFill>
-            <a:srgbClr val="B23A2A"/>
+            <a:srgbClr val="C8A86B"/>
           </a:solidFill>
           <a:ln>
             <a:noFill/>
@@ -7148,14 +7289,14 @@
       </p:sp>
       <p:sp>
         <p:nvSpPr>
-          <p:cNvPr id="17" name="TextBox 16"/>
+          <p:cNvPr id="18" name="TextBox 17"/>
           <p:cNvSpPr txBox="1"/>
           <p:nvPr/>
         </p:nvSpPr>
         <p:spPr>
           <a:xfrm>
-            <a:off x="804672" y="3922776"/>
-            <a:ext cx="457200" cy="384048"/>
+            <a:off x="8386876" y="2496312"/>
+            <a:ext cx="548640" cy="411480"/>
           </a:xfrm>
           <a:prstGeom prst="rect">
             <a:avLst/>
@@ -7170,7 +7311,7 @@
           <a:p>
             <a:pPr algn="ctr"/>
             <a:r>
-              <a:rPr sz="1600" b="1">
+              <a:rPr sz="2000" b="1">
                 <a:solidFill>
                   <a:srgbClr val="FFFFFF"/>
                 </a:solidFill>
@@ -7178,21 +7319,21 @@
                 <a:ea typeface="微软雅黑"/>
                 <a:cs typeface="微软雅黑"/>
               </a:rPr>
-              <a:t>!</a:t>
-            </a:r>
-          </a:p>
-        </p:txBody>
-      </p:sp>
-      <p:sp>
-        <p:nvSpPr>
-          <p:cNvPr id="18" name="TextBox 17"/>
+              <a:t>3</a:t>
+            </a:r>
+          </a:p>
+        </p:txBody>
+      </p:sp>
+      <p:sp>
+        <p:nvSpPr>
+          <p:cNvPr id="19" name="TextBox 18"/>
           <p:cNvSpPr txBox="1"/>
           <p:nvPr/>
         </p:nvSpPr>
         <p:spPr>
           <a:xfrm>
-            <a:off x="1371600" y="3813048"/>
-            <a:ext cx="4434840" cy="457200"/>
+            <a:off x="9118396" y="2441448"/>
+            <a:ext cx="2250338" cy="640080"/>
           </a:xfrm>
           <a:prstGeom prst="rect">
             <a:avLst/>
@@ -7207,52 +7348,11 @@
           <a:p>
             <a:pPr algn="l">
               <a:lnSpc>
-                <a:spcPct val="110000"/>
+                <a:spcPct val="125000"/>
               </a:lnSpc>
             </a:pPr>
             <a:r>
               <a:rPr sz="1600" b="1">
-                <a:solidFill>
-                  <a:srgbClr val="1C2A33"/>
-                </a:solidFill>
-                <a:latin typeface="微软雅黑"/>
-                <a:ea typeface="微软雅黑"/>
-                <a:cs typeface="微软雅黑"/>
-              </a:rPr>
-              <a:t/>
-            </a:r>
-          </a:p>
-        </p:txBody>
-      </p:sp>
-      <p:sp>
-        <p:nvSpPr>
-          <p:cNvPr id="19" name="TextBox 18"/>
-          <p:cNvSpPr txBox="1"/>
-          <p:nvPr/>
-        </p:nvSpPr>
-        <p:spPr>
-          <a:xfrm>
-            <a:off x="1371600" y="4251960"/>
-            <a:ext cx="4434840" cy="1417320"/>
-          </a:xfrm>
-          <a:prstGeom prst="rect">
-            <a:avLst/>
-          </a:prstGeom>
-          <a:noFill/>
-        </p:spPr>
-        <p:txBody>
-          <a:bodyPr wrap="square" anchor="t" lIns="0" rIns="0" tIns="0" bIns="0">
-            <a:spAutoFit/>
-          </a:bodyPr>
-          <a:lstStyle/>
-          <a:p>
-            <a:pPr algn="l">
-              <a:lnSpc>
-                <a:spcPct val="128000"/>
-              </a:lnSpc>
-            </a:pPr>
-            <a:r>
-              <a:rPr sz="1400" b="0">
                 <a:solidFill>
                   <a:srgbClr val="1C2A33"/>
                 </a:solidFill>
@@ -7260,7 +7360,7 @@
                 <a:ea typeface="楷体"/>
                 <a:cs typeface="楷体"/>
               </a:rPr>
-              <a:t>③ 细微处。原因：落蕊无声等细节易忽略，需细读。</a:t>
+              <a:t>忽略细微处</a:t>
             </a:r>
           </a:p>
         </p:txBody>
@@ -7268,6 +7368,47 @@
       <p:sp>
         <p:nvSpPr>
           <p:cNvPr id="20" name="TextBox 19"/>
+          <p:cNvSpPr txBox="1"/>
+          <p:nvPr/>
+        </p:nvSpPr>
+        <p:spPr>
+          <a:xfrm>
+            <a:off x="8432596" y="3200400"/>
+            <a:ext cx="2844698" cy="2697480"/>
+          </a:xfrm>
+          <a:prstGeom prst="rect">
+            <a:avLst/>
+          </a:prstGeom>
+          <a:noFill/>
+        </p:spPr>
+        <p:txBody>
+          <a:bodyPr wrap="square" anchor="t" lIns="0" rIns="0" tIns="0" bIns="0">
+            <a:spAutoFit/>
+          </a:bodyPr>
+          <a:lstStyle/>
+          <a:p>
+            <a:pPr algn="l">
+              <a:lnSpc>
+                <a:spcPct val="155000"/>
+              </a:lnSpc>
+            </a:pPr>
+            <a:r>
+              <a:rPr sz="1350" b="0">
+                <a:solidFill>
+                  <a:srgbClr val="1C2A33"/>
+                </a:solidFill>
+                <a:latin typeface="楷体"/>
+                <a:ea typeface="楷体"/>
+                <a:cs typeface="楷体"/>
+              </a:rPr>
+              <a:t>落蕊无声、蝉声残弱，细处才见味，慢读。</a:t>
+            </a:r>
+          </a:p>
+        </p:txBody>
+      </p:sp>
+      <p:sp>
+        <p:nvSpPr>
+          <p:cNvPr id="21" name="TextBox 20"/>
           <p:cNvSpPr txBox="1"/>
           <p:nvPr/>
         </p:nvSpPr>
@@ -7394,13 +7535,13 @@
             <a:r>
               <a:rPr sz="1300" b="1">
                 <a:solidFill>
-                  <a:srgbClr val="C8A86B"/>
+                  <a:srgbClr val="B23A2A"/>
                 </a:solidFill>
                 <a:latin typeface="微软雅黑"/>
                 <a:ea typeface="微软雅黑"/>
                 <a:cs typeface="微软雅黑"/>
               </a:rPr>
-              <a:t>要点板书</a:t>
+              <a:t>板书精华</a:t>
             </a:r>
           </a:p>
         </p:txBody>
@@ -7420,7 +7561,7 @@
             <a:avLst/>
           </a:prstGeom>
           <a:solidFill>
-            <a:srgbClr val="C8A86B"/>
+            <a:srgbClr val="B23A2A"/>
           </a:solidFill>
           <a:ln>
             <a:noFill/>
@@ -7451,25 +7592,60 @@
       </p:sp>
       <p:sp>
         <p:nvSpPr>
-          <p:cNvPr id="5" name="Rounded Rectangle 4"/>
+          <p:cNvPr id="5" name="TextBox 4"/>
+          <p:cNvSpPr txBox="1"/>
+          <p:nvPr/>
+        </p:nvSpPr>
+        <p:spPr>
+          <a:xfrm>
+            <a:off x="640080" y="1280160"/>
+            <a:ext cx="10515600" cy="548640"/>
+          </a:xfrm>
+          <a:prstGeom prst="rect">
+            <a:avLst/>
+          </a:prstGeom>
+          <a:noFill/>
+        </p:spPr>
+        <p:txBody>
+          <a:bodyPr wrap="square" anchor="t" lIns="0" rIns="0" tIns="0" bIns="0">
+            <a:spAutoFit/>
+          </a:bodyPr>
+          <a:lstStyle/>
+          <a:p>
+            <a:pPr algn="l"/>
+            <a:r>
+              <a:rPr sz="2800" b="1">
+                <a:solidFill>
+                  <a:srgbClr val="1C2A33"/>
+                </a:solidFill>
+                <a:latin typeface="楷体"/>
+                <a:ea typeface="楷体"/>
+                <a:cs typeface="楷体"/>
+              </a:rPr>
+              <a:t>板书精华</a:t>
+            </a:r>
+          </a:p>
+        </p:txBody>
+      </p:sp>
+      <p:sp>
+        <p:nvSpPr>
+          <p:cNvPr id="6" name="Rectangle 5"/>
           <p:cNvSpPr/>
           <p:nvPr/>
         </p:nvSpPr>
         <p:spPr>
           <a:xfrm>
-            <a:off x="640080" y="1417320"/>
-            <a:ext cx="10911535" cy="5394960"/>
-          </a:xfrm>
-          <a:prstGeom prst="roundRect">
+            <a:off x="640080" y="1783080"/>
+            <a:ext cx="10911535" cy="502920"/>
+          </a:xfrm>
+          <a:prstGeom prst="rect">
             <a:avLst/>
           </a:prstGeom>
           <a:solidFill>
-            <a:srgbClr val="FFFFFF"/>
+            <a:srgbClr val="1C2A33"/>
           </a:solidFill>
-          <a:ln w="25400">
-            <a:solidFill>
-              <a:srgbClr val="C8A86B"/>
-            </a:solidFill>
+          <a:ln>
+            <a:noFill/>
           </a:ln>
           <a:effectLst/>
         </p:spPr>
@@ -7497,14 +7673,14 @@
       </p:sp>
       <p:sp>
         <p:nvSpPr>
-          <p:cNvPr id="6" name="TextBox 5"/>
+          <p:cNvPr id="7" name="TextBox 6"/>
           <p:cNvSpPr txBox="1"/>
           <p:nvPr/>
         </p:nvSpPr>
         <p:spPr>
           <a:xfrm>
-            <a:off x="914400" y="1554480"/>
-            <a:ext cx="10362895" cy="5120640"/>
+            <a:off x="914400" y="1837944"/>
+            <a:ext cx="3108960" cy="365760"/>
           </a:xfrm>
           <a:prstGeom prst="rect">
             <a:avLst/>
@@ -7517,49 +7693,781 @@
           </a:bodyPr>
           <a:lstStyle/>
           <a:p>
-            <a:pPr algn="l">
-              <a:lnSpc>
-                <a:spcPct val="110000"/>
-              </a:lnSpc>
-              <a:spcAft>
-                <a:spcPts val="100"/>
-              </a:spcAft>
-            </a:pPr>
-            <a:r>
-              <a:rPr sz="1300" b="0">
-                <a:solidFill>
-                  <a:srgbClr val="1C2A33"/>
+            <a:pPr algn="l"/>
+            <a:r>
+              <a:rPr sz="1500" b="1">
+                <a:solidFill>
+                  <a:srgbClr val="FFFFFF"/>
                 </a:solidFill>
                 <a:latin typeface="微软雅黑"/>
                 <a:ea typeface="微软雅黑"/>
                 <a:cs typeface="微软雅黑"/>
               </a:rPr>
-              <a:t>┌── 故都的秋 郁达夫 ──┐
-│ 文眼:清·静·悲凉 │
-│ │
-│ 【五幅画面】 │
-│ 庭院破屋喝茶 │
-│ 槐树落蕊(无声) │
-│ 秋蝉残声 │
-│ 秋雨话凉 │
-│ 秋果胜果 │
-│ │
-│ 解码: │
-│ 落蕊=静 蝉=悲凉│
-│ 破屋=清闲 │
-│ │
-│ 形散神聚 │
-│ 散(五画)→聚(悲凉)│
-│ │
-│ 南国(淡)↔北国(浓)│
-└────────────────┘</a:t>
-            </a:r>
-          </a:p>
-        </p:txBody>
-      </p:sp>
-      <p:sp>
-        <p:nvSpPr>
-          <p:cNvPr id="7" name="TextBox 6"/>
+              <a:t>维度</a:t>
+            </a:r>
+          </a:p>
+        </p:txBody>
+      </p:sp>
+      <p:sp>
+        <p:nvSpPr>
+          <p:cNvPr id="8" name="TextBox 7"/>
+          <p:cNvSpPr txBox="1"/>
+          <p:nvPr/>
+        </p:nvSpPr>
+        <p:spPr>
+          <a:xfrm>
+            <a:off x="4297680" y="1837944"/>
+            <a:ext cx="7680960" cy="365760"/>
+          </a:xfrm>
+          <a:prstGeom prst="rect">
+            <a:avLst/>
+          </a:prstGeom>
+          <a:noFill/>
+        </p:spPr>
+        <p:txBody>
+          <a:bodyPr wrap="square" anchor="t" lIns="0" rIns="0" tIns="0" bIns="0">
+            <a:spAutoFit/>
+          </a:bodyPr>
+          <a:lstStyle/>
+          <a:p>
+            <a:pPr algn="l"/>
+            <a:r>
+              <a:rPr sz="1500" b="1">
+                <a:solidFill>
+                  <a:srgbClr val="C8A86B"/>
+                </a:solidFill>
+                <a:latin typeface="微软雅黑"/>
+                <a:ea typeface="微软雅黑"/>
+                <a:cs typeface="微软雅黑"/>
+              </a:rPr>
+              <a:t>内容</a:t>
+            </a:r>
+          </a:p>
+        </p:txBody>
+      </p:sp>
+      <p:sp>
+        <p:nvSpPr>
+          <p:cNvPr id="9" name="Rounded Rectangle 8"/>
+          <p:cNvSpPr/>
+          <p:nvPr/>
+        </p:nvSpPr>
+        <p:spPr>
+          <a:xfrm>
+            <a:off x="640080" y="2331720"/>
+            <a:ext cx="10911535" cy="566928"/>
+          </a:xfrm>
+          <a:prstGeom prst="roundRect">
+            <a:avLst/>
+          </a:prstGeom>
+          <a:solidFill>
+            <a:srgbClr val="FFFFFF"/>
+          </a:solidFill>
+          <a:ln w="10160">
+            <a:solidFill>
+              <a:srgbClr val="6B6258"/>
+            </a:solidFill>
+          </a:ln>
+          <a:effectLst/>
+        </p:spPr>
+        <p:style>
+          <a:lnRef idx="1">
+            <a:schemeClr val="accent1"/>
+          </a:lnRef>
+          <a:fillRef idx="3">
+            <a:schemeClr val="accent1"/>
+          </a:fillRef>
+          <a:effectRef idx="2">
+            <a:schemeClr val="accent1"/>
+          </a:effectRef>
+          <a:fontRef idx="minor">
+            <a:schemeClr val="lt1"/>
+          </a:fontRef>
+        </p:style>
+        <p:txBody>
+          <a:bodyPr rtlCol="0" anchor="ctr"/>
+          <a:lstStyle/>
+          <a:p>
+            <a:pPr algn="ctr"/>
+          </a:p>
+        </p:txBody>
+      </p:sp>
+      <p:sp>
+        <p:nvSpPr>
+          <p:cNvPr id="10" name="TextBox 9"/>
+          <p:cNvSpPr txBox="1"/>
+          <p:nvPr/>
+        </p:nvSpPr>
+        <p:spPr>
+          <a:xfrm>
+            <a:off x="914400" y="2432304"/>
+            <a:ext cx="3108960" cy="384048"/>
+          </a:xfrm>
+          <a:prstGeom prst="rect">
+            <a:avLst/>
+          </a:prstGeom>
+          <a:noFill/>
+        </p:spPr>
+        <p:txBody>
+          <a:bodyPr wrap="square" anchor="t" lIns="0" rIns="0" tIns="0" bIns="0">
+            <a:spAutoFit/>
+          </a:bodyPr>
+          <a:lstStyle/>
+          <a:p>
+            <a:pPr algn="l"/>
+            <a:r>
+              <a:rPr sz="1400" b="1">
+                <a:solidFill>
+                  <a:srgbClr val="B23A2A"/>
+                </a:solidFill>
+                <a:latin typeface="微软雅黑"/>
+                <a:ea typeface="微软雅黑"/>
+                <a:cs typeface="微软雅黑"/>
+              </a:rPr>
+              <a:t>文眼</a:t>
+            </a:r>
+          </a:p>
+        </p:txBody>
+      </p:sp>
+      <p:sp>
+        <p:nvSpPr>
+          <p:cNvPr id="11" name="TextBox 10"/>
+          <p:cNvSpPr txBox="1"/>
+          <p:nvPr/>
+        </p:nvSpPr>
+        <p:spPr>
+          <a:xfrm>
+            <a:off x="4297680" y="2432304"/>
+            <a:ext cx="7680960" cy="384048"/>
+          </a:xfrm>
+          <a:prstGeom prst="rect">
+            <a:avLst/>
+          </a:prstGeom>
+          <a:noFill/>
+        </p:spPr>
+        <p:txBody>
+          <a:bodyPr wrap="square" anchor="t" lIns="0" rIns="0" tIns="0" bIns="0">
+            <a:spAutoFit/>
+          </a:bodyPr>
+          <a:lstStyle/>
+          <a:p>
+            <a:pPr algn="l"/>
+            <a:r>
+              <a:rPr sz="1250" b="0">
+                <a:solidFill>
+                  <a:srgbClr val="1C2A33"/>
+                </a:solidFill>
+                <a:latin typeface="楷体"/>
+                <a:ea typeface="楷体"/>
+                <a:cs typeface="楷体"/>
+              </a:rPr>
+              <a:t>清 · 静 · 悲凉</a:t>
+            </a:r>
+          </a:p>
+        </p:txBody>
+      </p:sp>
+      <p:sp>
+        <p:nvSpPr>
+          <p:cNvPr id="12" name="Rounded Rectangle 11"/>
+          <p:cNvSpPr/>
+          <p:nvPr/>
+        </p:nvSpPr>
+        <p:spPr>
+          <a:xfrm>
+            <a:off x="640080" y="2953512"/>
+            <a:ext cx="10911535" cy="566928"/>
+          </a:xfrm>
+          <a:prstGeom prst="roundRect">
+            <a:avLst/>
+          </a:prstGeom>
+          <a:solidFill>
+            <a:srgbClr val="E7DFD2"/>
+          </a:solidFill>
+          <a:ln w="10160">
+            <a:solidFill>
+              <a:srgbClr val="6B6258"/>
+            </a:solidFill>
+          </a:ln>
+          <a:effectLst/>
+        </p:spPr>
+        <p:style>
+          <a:lnRef idx="1">
+            <a:schemeClr val="accent1"/>
+          </a:lnRef>
+          <a:fillRef idx="3">
+            <a:schemeClr val="accent1"/>
+          </a:fillRef>
+          <a:effectRef idx="2">
+            <a:schemeClr val="accent1"/>
+          </a:effectRef>
+          <a:fontRef idx="minor">
+            <a:schemeClr val="lt1"/>
+          </a:fontRef>
+        </p:style>
+        <p:txBody>
+          <a:bodyPr rtlCol="0" anchor="ctr"/>
+          <a:lstStyle/>
+          <a:p>
+            <a:pPr algn="ctr"/>
+          </a:p>
+        </p:txBody>
+      </p:sp>
+      <p:sp>
+        <p:nvSpPr>
+          <p:cNvPr id="13" name="TextBox 12"/>
+          <p:cNvSpPr txBox="1"/>
+          <p:nvPr/>
+        </p:nvSpPr>
+        <p:spPr>
+          <a:xfrm>
+            <a:off x="914400" y="3054096"/>
+            <a:ext cx="3108960" cy="384048"/>
+          </a:xfrm>
+          <a:prstGeom prst="rect">
+            <a:avLst/>
+          </a:prstGeom>
+          <a:noFill/>
+        </p:spPr>
+        <p:txBody>
+          <a:bodyPr wrap="square" anchor="t" lIns="0" rIns="0" tIns="0" bIns="0">
+            <a:spAutoFit/>
+          </a:bodyPr>
+          <a:lstStyle/>
+          <a:p>
+            <a:pPr algn="l"/>
+            <a:r>
+              <a:rPr sz="1400" b="1">
+                <a:solidFill>
+                  <a:srgbClr val="B23A2A"/>
+                </a:solidFill>
+                <a:latin typeface="微软雅黑"/>
+                <a:ea typeface="微软雅黑"/>
+                <a:cs typeface="微软雅黑"/>
+              </a:rPr>
+              <a:t>五幅画面</a:t>
+            </a:r>
+          </a:p>
+        </p:txBody>
+      </p:sp>
+      <p:sp>
+        <p:nvSpPr>
+          <p:cNvPr id="14" name="TextBox 13"/>
+          <p:cNvSpPr txBox="1"/>
+          <p:nvPr/>
+        </p:nvSpPr>
+        <p:spPr>
+          <a:xfrm>
+            <a:off x="4297680" y="3054096"/>
+            <a:ext cx="7680960" cy="384048"/>
+          </a:xfrm>
+          <a:prstGeom prst="rect">
+            <a:avLst/>
+          </a:prstGeom>
+          <a:noFill/>
+        </p:spPr>
+        <p:txBody>
+          <a:bodyPr wrap="square" anchor="t" lIns="0" rIns="0" tIns="0" bIns="0">
+            <a:spAutoFit/>
+          </a:bodyPr>
+          <a:lstStyle/>
+          <a:p>
+            <a:pPr algn="l"/>
+            <a:r>
+              <a:rPr sz="1250" b="0">
+                <a:solidFill>
+                  <a:srgbClr val="1C2A33"/>
+                </a:solidFill>
+                <a:latin typeface="楷体"/>
+                <a:ea typeface="楷体"/>
+                <a:cs typeface="楷体"/>
+              </a:rPr>
+              <a:t>庭院破屋 / 槐树落蕊</a:t>
+            </a:r>
+          </a:p>
+        </p:txBody>
+      </p:sp>
+      <p:sp>
+        <p:nvSpPr>
+          <p:cNvPr id="15" name="Rounded Rectangle 14"/>
+          <p:cNvSpPr/>
+          <p:nvPr/>
+        </p:nvSpPr>
+        <p:spPr>
+          <a:xfrm>
+            <a:off x="640080" y="3575304"/>
+            <a:ext cx="10911535" cy="566928"/>
+          </a:xfrm>
+          <a:prstGeom prst="roundRect">
+            <a:avLst/>
+          </a:prstGeom>
+          <a:solidFill>
+            <a:srgbClr val="FFFFFF"/>
+          </a:solidFill>
+          <a:ln w="10160">
+            <a:solidFill>
+              <a:srgbClr val="6B6258"/>
+            </a:solidFill>
+          </a:ln>
+          <a:effectLst/>
+        </p:spPr>
+        <p:style>
+          <a:lnRef idx="1">
+            <a:schemeClr val="accent1"/>
+          </a:lnRef>
+          <a:fillRef idx="3">
+            <a:schemeClr val="accent1"/>
+          </a:fillRef>
+          <a:effectRef idx="2">
+            <a:schemeClr val="accent1"/>
+          </a:effectRef>
+          <a:fontRef idx="minor">
+            <a:schemeClr val="lt1"/>
+          </a:fontRef>
+        </p:style>
+        <p:txBody>
+          <a:bodyPr rtlCol="0" anchor="ctr"/>
+          <a:lstStyle/>
+          <a:p>
+            <a:pPr algn="ctr"/>
+          </a:p>
+        </p:txBody>
+      </p:sp>
+      <p:sp>
+        <p:nvSpPr>
+          <p:cNvPr id="16" name="TextBox 15"/>
+          <p:cNvSpPr txBox="1"/>
+          <p:nvPr/>
+        </p:nvSpPr>
+        <p:spPr>
+          <a:xfrm>
+            <a:off x="914400" y="3675888"/>
+            <a:ext cx="3108960" cy="384048"/>
+          </a:xfrm>
+          <a:prstGeom prst="rect">
+            <a:avLst/>
+          </a:prstGeom>
+          <a:noFill/>
+        </p:spPr>
+        <p:txBody>
+          <a:bodyPr wrap="square" anchor="t" lIns="0" rIns="0" tIns="0" bIns="0">
+            <a:spAutoFit/>
+          </a:bodyPr>
+          <a:lstStyle/>
+          <a:p>
+            <a:pPr algn="l"/>
+            <a:r>
+              <a:rPr sz="1400" b="1">
+                <a:solidFill>
+                  <a:srgbClr val="B23A2A"/>
+                </a:solidFill>
+                <a:latin typeface="微软雅黑"/>
+                <a:ea typeface="微软雅黑"/>
+                <a:cs typeface="微软雅黑"/>
+              </a:rPr>
+              <a:t>五幅画面</a:t>
+            </a:r>
+          </a:p>
+        </p:txBody>
+      </p:sp>
+      <p:sp>
+        <p:nvSpPr>
+          <p:cNvPr id="17" name="TextBox 16"/>
+          <p:cNvSpPr txBox="1"/>
+          <p:nvPr/>
+        </p:nvSpPr>
+        <p:spPr>
+          <a:xfrm>
+            <a:off x="4297680" y="3675888"/>
+            <a:ext cx="7680960" cy="384048"/>
+          </a:xfrm>
+          <a:prstGeom prst="rect">
+            <a:avLst/>
+          </a:prstGeom>
+          <a:noFill/>
+        </p:spPr>
+        <p:txBody>
+          <a:bodyPr wrap="square" anchor="t" lIns="0" rIns="0" tIns="0" bIns="0">
+            <a:spAutoFit/>
+          </a:bodyPr>
+          <a:lstStyle/>
+          <a:p>
+            <a:pPr algn="l"/>
+            <a:r>
+              <a:rPr sz="1250" b="0">
+                <a:solidFill>
+                  <a:srgbClr val="1C2A33"/>
+                </a:solidFill>
+                <a:latin typeface="楷体"/>
+                <a:ea typeface="楷体"/>
+                <a:cs typeface="楷体"/>
+              </a:rPr>
+              <a:t>秋蝉残声 / 秋雨话凉 / 秋果</a:t>
+            </a:r>
+          </a:p>
+        </p:txBody>
+      </p:sp>
+      <p:sp>
+        <p:nvSpPr>
+          <p:cNvPr id="18" name="Rounded Rectangle 17"/>
+          <p:cNvSpPr/>
+          <p:nvPr/>
+        </p:nvSpPr>
+        <p:spPr>
+          <a:xfrm>
+            <a:off x="640080" y="4197096"/>
+            <a:ext cx="10911535" cy="566928"/>
+          </a:xfrm>
+          <a:prstGeom prst="roundRect">
+            <a:avLst/>
+          </a:prstGeom>
+          <a:solidFill>
+            <a:srgbClr val="E7DFD2"/>
+          </a:solidFill>
+          <a:ln w="10160">
+            <a:solidFill>
+              <a:srgbClr val="6B6258"/>
+            </a:solidFill>
+          </a:ln>
+          <a:effectLst/>
+        </p:spPr>
+        <p:style>
+          <a:lnRef idx="1">
+            <a:schemeClr val="accent1"/>
+          </a:lnRef>
+          <a:fillRef idx="3">
+            <a:schemeClr val="accent1"/>
+          </a:fillRef>
+          <a:effectRef idx="2">
+            <a:schemeClr val="accent1"/>
+          </a:effectRef>
+          <a:fontRef idx="minor">
+            <a:schemeClr val="lt1"/>
+          </a:fontRef>
+        </p:style>
+        <p:txBody>
+          <a:bodyPr rtlCol="0" anchor="ctr"/>
+          <a:lstStyle/>
+          <a:p>
+            <a:pPr algn="ctr"/>
+          </a:p>
+        </p:txBody>
+      </p:sp>
+      <p:sp>
+        <p:nvSpPr>
+          <p:cNvPr id="19" name="TextBox 18"/>
+          <p:cNvSpPr txBox="1"/>
+          <p:nvPr/>
+        </p:nvSpPr>
+        <p:spPr>
+          <a:xfrm>
+            <a:off x="914400" y="4297680"/>
+            <a:ext cx="3108960" cy="384048"/>
+          </a:xfrm>
+          <a:prstGeom prst="rect">
+            <a:avLst/>
+          </a:prstGeom>
+          <a:noFill/>
+        </p:spPr>
+        <p:txBody>
+          <a:bodyPr wrap="square" anchor="t" lIns="0" rIns="0" tIns="0" bIns="0">
+            <a:spAutoFit/>
+          </a:bodyPr>
+          <a:lstStyle/>
+          <a:p>
+            <a:pPr algn="l"/>
+            <a:r>
+              <a:rPr sz="1400" b="1">
+                <a:solidFill>
+                  <a:srgbClr val="B23A2A"/>
+                </a:solidFill>
+                <a:latin typeface="微软雅黑"/>
+                <a:ea typeface="微软雅黑"/>
+                <a:cs typeface="微软雅黑"/>
+              </a:rPr>
+              <a:t>解码</a:t>
+            </a:r>
+          </a:p>
+        </p:txBody>
+      </p:sp>
+      <p:sp>
+        <p:nvSpPr>
+          <p:cNvPr id="20" name="TextBox 19"/>
+          <p:cNvSpPr txBox="1"/>
+          <p:nvPr/>
+        </p:nvSpPr>
+        <p:spPr>
+          <a:xfrm>
+            <a:off x="4297680" y="4297680"/>
+            <a:ext cx="7680960" cy="384048"/>
+          </a:xfrm>
+          <a:prstGeom prst="rect">
+            <a:avLst/>
+          </a:prstGeom>
+          <a:noFill/>
+        </p:spPr>
+        <p:txBody>
+          <a:bodyPr wrap="square" anchor="t" lIns="0" rIns="0" tIns="0" bIns="0">
+            <a:spAutoFit/>
+          </a:bodyPr>
+          <a:lstStyle/>
+          <a:p>
+            <a:pPr algn="l"/>
+            <a:r>
+              <a:rPr sz="1250" b="0">
+                <a:solidFill>
+                  <a:srgbClr val="1C2A33"/>
+                </a:solidFill>
+                <a:latin typeface="楷体"/>
+                <a:ea typeface="楷体"/>
+                <a:cs typeface="楷体"/>
+              </a:rPr>
+              <a:t>落蕊=静 蝉=悲凉 破屋=清闲</a:t>
+            </a:r>
+          </a:p>
+        </p:txBody>
+      </p:sp>
+      <p:sp>
+        <p:nvSpPr>
+          <p:cNvPr id="21" name="Rounded Rectangle 20"/>
+          <p:cNvSpPr/>
+          <p:nvPr/>
+        </p:nvSpPr>
+        <p:spPr>
+          <a:xfrm>
+            <a:off x="640080" y="4818888"/>
+            <a:ext cx="10911535" cy="566928"/>
+          </a:xfrm>
+          <a:prstGeom prst="roundRect">
+            <a:avLst/>
+          </a:prstGeom>
+          <a:solidFill>
+            <a:srgbClr val="FFFFFF"/>
+          </a:solidFill>
+          <a:ln w="10160">
+            <a:solidFill>
+              <a:srgbClr val="6B6258"/>
+            </a:solidFill>
+          </a:ln>
+          <a:effectLst/>
+        </p:spPr>
+        <p:style>
+          <a:lnRef idx="1">
+            <a:schemeClr val="accent1"/>
+          </a:lnRef>
+          <a:fillRef idx="3">
+            <a:schemeClr val="accent1"/>
+          </a:fillRef>
+          <a:effectRef idx="2">
+            <a:schemeClr val="accent1"/>
+          </a:effectRef>
+          <a:fontRef idx="minor">
+            <a:schemeClr val="lt1"/>
+          </a:fontRef>
+        </p:style>
+        <p:txBody>
+          <a:bodyPr rtlCol="0" anchor="ctr"/>
+          <a:lstStyle/>
+          <a:p>
+            <a:pPr algn="ctr"/>
+          </a:p>
+        </p:txBody>
+      </p:sp>
+      <p:sp>
+        <p:nvSpPr>
+          <p:cNvPr id="22" name="TextBox 21"/>
+          <p:cNvSpPr txBox="1"/>
+          <p:nvPr/>
+        </p:nvSpPr>
+        <p:spPr>
+          <a:xfrm>
+            <a:off x="914400" y="4919472"/>
+            <a:ext cx="3108960" cy="384048"/>
+          </a:xfrm>
+          <a:prstGeom prst="rect">
+            <a:avLst/>
+          </a:prstGeom>
+          <a:noFill/>
+        </p:spPr>
+        <p:txBody>
+          <a:bodyPr wrap="square" anchor="t" lIns="0" rIns="0" tIns="0" bIns="0">
+            <a:spAutoFit/>
+          </a:bodyPr>
+          <a:lstStyle/>
+          <a:p>
+            <a:pPr algn="l"/>
+            <a:r>
+              <a:rPr sz="1400" b="1">
+                <a:solidFill>
+                  <a:srgbClr val="B23A2A"/>
+                </a:solidFill>
+                <a:latin typeface="微软雅黑"/>
+                <a:ea typeface="微软雅黑"/>
+                <a:cs typeface="微软雅黑"/>
+              </a:rPr>
+              <a:t>形散神聚</a:t>
+            </a:r>
+          </a:p>
+        </p:txBody>
+      </p:sp>
+      <p:sp>
+        <p:nvSpPr>
+          <p:cNvPr id="23" name="TextBox 22"/>
+          <p:cNvSpPr txBox="1"/>
+          <p:nvPr/>
+        </p:nvSpPr>
+        <p:spPr>
+          <a:xfrm>
+            <a:off x="4297680" y="4919472"/>
+            <a:ext cx="7680960" cy="384048"/>
+          </a:xfrm>
+          <a:prstGeom prst="rect">
+            <a:avLst/>
+          </a:prstGeom>
+          <a:noFill/>
+        </p:spPr>
+        <p:txBody>
+          <a:bodyPr wrap="square" anchor="t" lIns="0" rIns="0" tIns="0" bIns="0">
+            <a:spAutoFit/>
+          </a:bodyPr>
+          <a:lstStyle/>
+          <a:p>
+            <a:pPr algn="l"/>
+            <a:r>
+              <a:rPr sz="1250" b="0">
+                <a:solidFill>
+                  <a:srgbClr val="1C2A33"/>
+                </a:solidFill>
+                <a:latin typeface="楷体"/>
+                <a:ea typeface="楷体"/>
+                <a:cs typeface="楷体"/>
+              </a:rPr>
+              <a:t>散(五画) → 聚(悲凉)</a:t>
+            </a:r>
+          </a:p>
+        </p:txBody>
+      </p:sp>
+      <p:sp>
+        <p:nvSpPr>
+          <p:cNvPr id="24" name="Rounded Rectangle 23"/>
+          <p:cNvSpPr/>
+          <p:nvPr/>
+        </p:nvSpPr>
+        <p:spPr>
+          <a:xfrm>
+            <a:off x="640080" y="5440680"/>
+            <a:ext cx="10911535" cy="566928"/>
+          </a:xfrm>
+          <a:prstGeom prst="roundRect">
+            <a:avLst/>
+          </a:prstGeom>
+          <a:solidFill>
+            <a:srgbClr val="E7DFD2"/>
+          </a:solidFill>
+          <a:ln w="10160">
+            <a:solidFill>
+              <a:srgbClr val="6B6258"/>
+            </a:solidFill>
+          </a:ln>
+          <a:effectLst/>
+        </p:spPr>
+        <p:style>
+          <a:lnRef idx="1">
+            <a:schemeClr val="accent1"/>
+          </a:lnRef>
+          <a:fillRef idx="3">
+            <a:schemeClr val="accent1"/>
+          </a:fillRef>
+          <a:effectRef idx="2">
+            <a:schemeClr val="accent1"/>
+          </a:effectRef>
+          <a:fontRef idx="minor">
+            <a:schemeClr val="lt1"/>
+          </a:fontRef>
+        </p:style>
+        <p:txBody>
+          <a:bodyPr rtlCol="0" anchor="ctr"/>
+          <a:lstStyle/>
+          <a:p>
+            <a:pPr algn="ctr"/>
+          </a:p>
+        </p:txBody>
+      </p:sp>
+      <p:sp>
+        <p:nvSpPr>
+          <p:cNvPr id="25" name="TextBox 24"/>
+          <p:cNvSpPr txBox="1"/>
+          <p:nvPr/>
+        </p:nvSpPr>
+        <p:spPr>
+          <a:xfrm>
+            <a:off x="914400" y="5541264"/>
+            <a:ext cx="3108960" cy="384048"/>
+          </a:xfrm>
+          <a:prstGeom prst="rect">
+            <a:avLst/>
+          </a:prstGeom>
+          <a:noFill/>
+        </p:spPr>
+        <p:txBody>
+          <a:bodyPr wrap="square" anchor="t" lIns="0" rIns="0" tIns="0" bIns="0">
+            <a:spAutoFit/>
+          </a:bodyPr>
+          <a:lstStyle/>
+          <a:p>
+            <a:pPr algn="l"/>
+            <a:r>
+              <a:rPr sz="1400" b="1">
+                <a:solidFill>
+                  <a:srgbClr val="B23A2A"/>
+                </a:solidFill>
+                <a:latin typeface="微软雅黑"/>
+                <a:ea typeface="微软雅黑"/>
+                <a:cs typeface="微软雅黑"/>
+              </a:rPr>
+              <a:t>反衬</a:t>
+            </a:r>
+          </a:p>
+        </p:txBody>
+      </p:sp>
+      <p:sp>
+        <p:nvSpPr>
+          <p:cNvPr id="26" name="TextBox 25"/>
+          <p:cNvSpPr txBox="1"/>
+          <p:nvPr/>
+        </p:nvSpPr>
+        <p:spPr>
+          <a:xfrm>
+            <a:off x="4297680" y="5541264"/>
+            <a:ext cx="7680960" cy="384048"/>
+          </a:xfrm>
+          <a:prstGeom prst="rect">
+            <a:avLst/>
+          </a:prstGeom>
+          <a:noFill/>
+        </p:spPr>
+        <p:txBody>
+          <a:bodyPr wrap="square" anchor="t" lIns="0" rIns="0" tIns="0" bIns="0">
+            <a:spAutoFit/>
+          </a:bodyPr>
+          <a:lstStyle/>
+          <a:p>
+            <a:pPr algn="l"/>
+            <a:r>
+              <a:rPr sz="1250" b="0">
+                <a:solidFill>
+                  <a:srgbClr val="1C2A33"/>
+                </a:solidFill>
+                <a:latin typeface="楷体"/>
+                <a:ea typeface="楷体"/>
+                <a:cs typeface="楷体"/>
+              </a:rPr>
+              <a:t>南国(淡) ↔ 北国(浓)</a:t>
+            </a:r>
+          </a:p>
+        </p:txBody>
+      </p:sp>
+      <p:sp>
+        <p:nvSpPr>
+          <p:cNvPr id="27" name="TextBox 26"/>
           <p:cNvSpPr txBox="1"/>
           <p:nvPr/>
         </p:nvSpPr>
@@ -7686,13 +8594,13 @@
             <a:r>
               <a:rPr sz="1300" b="1">
                 <a:solidFill>
-                  <a:srgbClr val="2E7D6B"/>
+                  <a:srgbClr val="B23A2A"/>
                 </a:solidFill>
                 <a:latin typeface="微软雅黑"/>
                 <a:ea typeface="微软雅黑"/>
                 <a:cs typeface="微软雅黑"/>
               </a:rPr>
-              <a:t>分层作业</a:t>
+              <a:t>作业</a:t>
             </a:r>
           </a:p>
         </p:txBody>
@@ -7707,6 +8615,301 @@
           <a:xfrm>
             <a:off x="640080" y="1097280"/>
             <a:ext cx="822960" cy="30480"/>
+          </a:xfrm>
+          <a:prstGeom prst="rect">
+            <a:avLst/>
+          </a:prstGeom>
+          <a:solidFill>
+            <a:srgbClr val="B23A2A"/>
+          </a:solidFill>
+          <a:ln>
+            <a:noFill/>
+          </a:ln>
+          <a:effectLst/>
+        </p:spPr>
+        <p:style>
+          <a:lnRef idx="1">
+            <a:schemeClr val="accent1"/>
+          </a:lnRef>
+          <a:fillRef idx="3">
+            <a:schemeClr val="accent1"/>
+          </a:fillRef>
+          <a:effectRef idx="2">
+            <a:schemeClr val="accent1"/>
+          </a:effectRef>
+          <a:fontRef idx="minor">
+            <a:schemeClr val="lt1"/>
+          </a:fontRef>
+        </p:style>
+        <p:txBody>
+          <a:bodyPr rtlCol="0" anchor="ctr"/>
+          <a:lstStyle/>
+          <a:p>
+            <a:pPr algn="ctr"/>
+          </a:p>
+        </p:txBody>
+      </p:sp>
+      <p:sp>
+        <p:nvSpPr>
+          <p:cNvPr id="5" name="TextBox 4"/>
+          <p:cNvSpPr txBox="1"/>
+          <p:nvPr/>
+        </p:nvSpPr>
+        <p:spPr>
+          <a:xfrm>
+            <a:off x="640080" y="1280160"/>
+            <a:ext cx="10515600" cy="548640"/>
+          </a:xfrm>
+          <a:prstGeom prst="rect">
+            <a:avLst/>
+          </a:prstGeom>
+          <a:noFill/>
+        </p:spPr>
+        <p:txBody>
+          <a:bodyPr wrap="square" anchor="t" lIns="0" rIns="0" tIns="0" bIns="0">
+            <a:spAutoFit/>
+          </a:bodyPr>
+          <a:lstStyle/>
+          <a:p>
+            <a:pPr algn="l"/>
+            <a:r>
+              <a:rPr sz="2800" b="1">
+                <a:solidFill>
+                  <a:srgbClr val="1C2A33"/>
+                </a:solidFill>
+                <a:latin typeface="楷体"/>
+                <a:ea typeface="楷体"/>
+                <a:cs typeface="楷体"/>
+              </a:rPr>
+              <a:t>分层作业</a:t>
+            </a:r>
+          </a:p>
+        </p:txBody>
+      </p:sp>
+      <p:sp>
+        <p:nvSpPr>
+          <p:cNvPr id="6" name="Rounded Rectangle 5"/>
+          <p:cNvSpPr/>
+          <p:nvPr/>
+        </p:nvSpPr>
+        <p:spPr>
+          <a:xfrm>
+            <a:off x="640080" y="2194560"/>
+            <a:ext cx="3393338" cy="3566160"/>
+          </a:xfrm>
+          <a:prstGeom prst="roundRect">
+            <a:avLst/>
+          </a:prstGeom>
+          <a:solidFill>
+            <a:srgbClr val="FFFFFF"/>
+          </a:solidFill>
+          <a:ln w="20320">
+            <a:solidFill>
+              <a:srgbClr val="B23A2A"/>
+            </a:solidFill>
+          </a:ln>
+          <a:effectLst/>
+        </p:spPr>
+        <p:style>
+          <a:lnRef idx="1">
+            <a:schemeClr val="accent1"/>
+          </a:lnRef>
+          <a:fillRef idx="3">
+            <a:schemeClr val="accent1"/>
+          </a:fillRef>
+          <a:effectRef idx="2">
+            <a:schemeClr val="accent1"/>
+          </a:effectRef>
+          <a:fontRef idx="minor">
+            <a:schemeClr val="lt1"/>
+          </a:fontRef>
+        </p:style>
+        <p:txBody>
+          <a:bodyPr rtlCol="0" anchor="ctr"/>
+          <a:lstStyle/>
+          <a:p>
+            <a:pPr algn="ctr"/>
+          </a:p>
+        </p:txBody>
+      </p:sp>
+      <p:sp>
+        <p:nvSpPr>
+          <p:cNvPr id="7" name="Rectangle 6"/>
+          <p:cNvSpPr/>
+          <p:nvPr/>
+        </p:nvSpPr>
+        <p:spPr>
+          <a:xfrm>
+            <a:off x="640080" y="2194560"/>
+            <a:ext cx="3393338" cy="548640"/>
+          </a:xfrm>
+          <a:prstGeom prst="rect">
+            <a:avLst/>
+          </a:prstGeom>
+          <a:solidFill>
+            <a:srgbClr val="B23A2A"/>
+          </a:solidFill>
+          <a:ln>
+            <a:noFill/>
+          </a:ln>
+          <a:effectLst/>
+        </p:spPr>
+        <p:style>
+          <a:lnRef idx="1">
+            <a:schemeClr val="accent1"/>
+          </a:lnRef>
+          <a:fillRef idx="3">
+            <a:schemeClr val="accent1"/>
+          </a:fillRef>
+          <a:effectRef idx="2">
+            <a:schemeClr val="accent1"/>
+          </a:effectRef>
+          <a:fontRef idx="minor">
+            <a:schemeClr val="lt1"/>
+          </a:fontRef>
+        </p:style>
+        <p:txBody>
+          <a:bodyPr rtlCol="0" anchor="ctr"/>
+          <a:lstStyle/>
+          <a:p>
+            <a:pPr algn="ctr"/>
+          </a:p>
+        </p:txBody>
+      </p:sp>
+      <p:sp>
+        <p:nvSpPr>
+          <p:cNvPr id="8" name="TextBox 7"/>
+          <p:cNvSpPr txBox="1"/>
+          <p:nvPr/>
+        </p:nvSpPr>
+        <p:spPr>
+          <a:xfrm>
+            <a:off x="640080" y="2304288"/>
+            <a:ext cx="3393338" cy="365760"/>
+          </a:xfrm>
+          <a:prstGeom prst="rect">
+            <a:avLst/>
+          </a:prstGeom>
+          <a:noFill/>
+        </p:spPr>
+        <p:txBody>
+          <a:bodyPr wrap="square" anchor="t" lIns="0" rIns="0" tIns="0" bIns="0">
+            <a:spAutoFit/>
+          </a:bodyPr>
+          <a:lstStyle/>
+          <a:p>
+            <a:pPr algn="ctr"/>
+            <a:r>
+              <a:rPr sz="1600" b="1">
+                <a:solidFill>
+                  <a:srgbClr val="FFFFFF"/>
+                </a:solidFill>
+                <a:latin typeface="微软雅黑"/>
+                <a:ea typeface="微软雅黑"/>
+                <a:cs typeface="微软雅黑"/>
+              </a:rPr>
+              <a:t>基础 · 必做</a:t>
+            </a:r>
+          </a:p>
+        </p:txBody>
+      </p:sp>
+      <p:sp>
+        <p:nvSpPr>
+          <p:cNvPr id="9" name="TextBox 8"/>
+          <p:cNvSpPr txBox="1"/>
+          <p:nvPr/>
+        </p:nvSpPr>
+        <p:spPr>
+          <a:xfrm>
+            <a:off x="914400" y="2971800"/>
+            <a:ext cx="2844698" cy="2651760"/>
+          </a:xfrm>
+          <a:prstGeom prst="rect">
+            <a:avLst/>
+          </a:prstGeom>
+          <a:noFill/>
+        </p:spPr>
+        <p:txBody>
+          <a:bodyPr wrap="square" anchor="t" lIns="0" rIns="0" tIns="0" bIns="0">
+            <a:spAutoFit/>
+          </a:bodyPr>
+          <a:lstStyle/>
+          <a:p>
+            <a:pPr algn="l">
+              <a:lnSpc>
+                <a:spcPct val="155000"/>
+              </a:lnSpc>
+            </a:pPr>
+            <a:r>
+              <a:rPr sz="1350" b="0">
+                <a:solidFill>
+                  <a:srgbClr val="1C2A33"/>
+                </a:solidFill>
+                <a:latin typeface="楷体"/>
+                <a:ea typeface="楷体"/>
+                <a:cs typeface="楷体"/>
+              </a:rPr>
+              <a:t>基础·必做：列出文中五幅秋景画面；用原文词语说明「清/静/悲凉」各一例。</a:t>
+            </a:r>
+          </a:p>
+        </p:txBody>
+      </p:sp>
+      <p:sp>
+        <p:nvSpPr>
+          <p:cNvPr id="10" name="Rounded Rectangle 9"/>
+          <p:cNvSpPr/>
+          <p:nvPr/>
+        </p:nvSpPr>
+        <p:spPr>
+          <a:xfrm>
+            <a:off x="4399178" y="2194560"/>
+            <a:ext cx="3393338" cy="3566160"/>
+          </a:xfrm>
+          <a:prstGeom prst="roundRect">
+            <a:avLst/>
+          </a:prstGeom>
+          <a:solidFill>
+            <a:srgbClr val="FFFFFF"/>
+          </a:solidFill>
+          <a:ln w="20320">
+            <a:solidFill>
+              <a:srgbClr val="2E7D6B"/>
+            </a:solidFill>
+          </a:ln>
+          <a:effectLst/>
+        </p:spPr>
+        <p:style>
+          <a:lnRef idx="1">
+            <a:schemeClr val="accent1"/>
+          </a:lnRef>
+          <a:fillRef idx="3">
+            <a:schemeClr val="accent1"/>
+          </a:fillRef>
+          <a:effectRef idx="2">
+            <a:schemeClr val="accent1"/>
+          </a:effectRef>
+          <a:fontRef idx="minor">
+            <a:schemeClr val="lt1"/>
+          </a:fontRef>
+        </p:style>
+        <p:txBody>
+          <a:bodyPr rtlCol="0" anchor="ctr"/>
+          <a:lstStyle/>
+          <a:p>
+            <a:pPr algn="ctr"/>
+          </a:p>
+        </p:txBody>
+      </p:sp>
+      <p:sp>
+        <p:nvSpPr>
+          <p:cNvPr id="11" name="Rectangle 10"/>
+          <p:cNvSpPr/>
+          <p:nvPr/>
+        </p:nvSpPr>
+        <p:spPr>
+          <a:xfrm>
+            <a:off x="4399178" y="2194560"/>
+            <a:ext cx="3393338" cy="548640"/>
           </a:xfrm>
           <a:prstGeom prst="rect">
             <a:avLst/>
@@ -7743,14 +8946,92 @@
       </p:sp>
       <p:sp>
         <p:nvSpPr>
-          <p:cNvPr id="5" name="Rounded Rectangle 4"/>
+          <p:cNvPr id="12" name="TextBox 11"/>
+          <p:cNvSpPr txBox="1"/>
+          <p:nvPr/>
+        </p:nvSpPr>
+        <p:spPr>
+          <a:xfrm>
+            <a:off x="4399178" y="2304288"/>
+            <a:ext cx="3393338" cy="365760"/>
+          </a:xfrm>
+          <a:prstGeom prst="rect">
+            <a:avLst/>
+          </a:prstGeom>
+          <a:noFill/>
+        </p:spPr>
+        <p:txBody>
+          <a:bodyPr wrap="square" anchor="t" lIns="0" rIns="0" tIns="0" bIns="0">
+            <a:spAutoFit/>
+          </a:bodyPr>
+          <a:lstStyle/>
+          <a:p>
+            <a:pPr algn="ctr"/>
+            <a:r>
+              <a:rPr sz="1600" b="1">
+                <a:solidFill>
+                  <a:srgbClr val="FFFFFF"/>
+                </a:solidFill>
+                <a:latin typeface="微软雅黑"/>
+                <a:ea typeface="微软雅黑"/>
+                <a:cs typeface="微软雅黑"/>
+              </a:rPr>
+              <a:t>提升 · 选做</a:t>
+            </a:r>
+          </a:p>
+        </p:txBody>
+      </p:sp>
+      <p:sp>
+        <p:nvSpPr>
+          <p:cNvPr id="13" name="TextBox 12"/>
+          <p:cNvSpPr txBox="1"/>
+          <p:nvPr/>
+        </p:nvSpPr>
+        <p:spPr>
+          <a:xfrm>
+            <a:off x="4673498" y="2971800"/>
+            <a:ext cx="2844698" cy="2651760"/>
+          </a:xfrm>
+          <a:prstGeom prst="rect">
+            <a:avLst/>
+          </a:prstGeom>
+          <a:noFill/>
+        </p:spPr>
+        <p:txBody>
+          <a:bodyPr wrap="square" anchor="t" lIns="0" rIns="0" tIns="0" bIns="0">
+            <a:spAutoFit/>
+          </a:bodyPr>
+          <a:lstStyle/>
+          <a:p>
+            <a:pPr algn="l">
+              <a:lnSpc>
+                <a:spcPct val="155000"/>
+              </a:lnSpc>
+            </a:pPr>
+            <a:r>
+              <a:rPr sz="1350" b="0">
+                <a:solidFill>
+                  <a:srgbClr val="1C2A33"/>
+                </a:solidFill>
+                <a:latin typeface="楷体"/>
+                <a:ea typeface="楷体"/>
+                <a:cs typeface="楷体"/>
+              </a:rPr>
+              <a:t>提升·选做：写160字「我眼里的清静悲凉」：仿五幅式选身边一景，用一情感词统摄，贴细处描写。</a:t>
+            </a:r>
+          </a:p>
+        </p:txBody>
+      </p:sp>
+      <p:sp>
+        <p:nvSpPr>
+          <p:cNvPr id="14" name="Rounded Rectangle 13"/>
           <p:cNvSpPr/>
           <p:nvPr/>
         </p:nvSpPr>
         <p:spPr>
           <a:xfrm>
-            <a:off x="640080" y="1417320"/>
-            <a:ext cx="10911535" cy="1417320"/>
+            <a:off x="8158276" y="2194560"/>
+            <a:ext cx="3393338" cy="3566160"/>
           </a:xfrm>
           <a:prstGeom prst="roundRect">
             <a:avLst/>
@@ -7758,9 +9039,9 @@
           <a:solidFill>
             <a:srgbClr val="FFFFFF"/>
           </a:solidFill>
-          <a:ln w="22860">
+          <a:ln w="20320">
             <a:solidFill>
-              <a:srgbClr val="2E7D6B"/>
+              <a:srgbClr val="C8A86B"/>
             </a:solidFill>
           </a:ln>
           <a:effectLst/>
@@ -7789,107 +9070,23 @@
       </p:sp>
       <p:sp>
         <p:nvSpPr>
-          <p:cNvPr id="6" name="TextBox 5"/>
-          <p:cNvSpPr txBox="1"/>
-          <p:nvPr/>
-        </p:nvSpPr>
-        <p:spPr>
-          <a:xfrm>
-            <a:off x="1371600" y="1527048"/>
-            <a:ext cx="9997135" cy="457200"/>
-          </a:xfrm>
-          <a:prstGeom prst="rect">
-            <a:avLst/>
-          </a:prstGeom>
-          <a:noFill/>
-        </p:spPr>
-        <p:txBody>
-          <a:bodyPr wrap="square" anchor="t" lIns="0" rIns="0" tIns="0" bIns="0">
-            <a:spAutoFit/>
-          </a:bodyPr>
-          <a:lstStyle/>
-          <a:p>
-            <a:pPr algn="l">
-              <a:lnSpc>
-                <a:spcPct val="110000"/>
-              </a:lnSpc>
-            </a:pPr>
-            <a:r>
-              <a:rPr sz="1600" b="1">
-                <a:solidFill>
-                  <a:srgbClr val="1C2A33"/>
-                </a:solidFill>
-                <a:latin typeface="微软雅黑"/>
-                <a:ea typeface="微软雅黑"/>
-                <a:cs typeface="微软雅黑"/>
-              </a:rPr>
-              <a:t/>
-            </a:r>
-          </a:p>
-        </p:txBody>
-      </p:sp>
-      <p:sp>
-        <p:nvSpPr>
-          <p:cNvPr id="7" name="TextBox 6"/>
-          <p:cNvSpPr txBox="1"/>
-          <p:nvPr/>
-        </p:nvSpPr>
-        <p:spPr>
-          <a:xfrm>
-            <a:off x="1371600" y="1965960"/>
-            <a:ext cx="9997135" cy="777240"/>
-          </a:xfrm>
-          <a:prstGeom prst="rect">
-            <a:avLst/>
-          </a:prstGeom>
-          <a:noFill/>
-        </p:spPr>
-        <p:txBody>
-          <a:bodyPr wrap="square" anchor="t" lIns="0" rIns="0" tIns="0" bIns="0">
-            <a:spAutoFit/>
-          </a:bodyPr>
-          <a:lstStyle/>
-          <a:p>
-            <a:pPr algn="l">
-              <a:lnSpc>
-                <a:spcPct val="128000"/>
-              </a:lnSpc>
-            </a:pPr>
-            <a:r>
-              <a:rPr sz="1200" b="0">
-                <a:solidFill>
-                  <a:srgbClr val="1C2A33"/>
-                </a:solidFill>
-                <a:latin typeface="楷体"/>
-                <a:ea typeface="楷体"/>
-                <a:cs typeface="楷体"/>
-              </a:rPr>
-              <a:t>【基础作业】1. 列出文中五幅秋景画面。2. 用原文词语说明「清/静/悲凉」各一例。</a:t>
-            </a:r>
-          </a:p>
-        </p:txBody>
-      </p:sp>
-      <p:sp>
-        <p:nvSpPr>
-          <p:cNvPr id="8" name="Rounded Rectangle 7"/>
+          <p:cNvPr id="15" name="Rectangle 14"/>
           <p:cNvSpPr/>
           <p:nvPr/>
         </p:nvSpPr>
         <p:spPr>
           <a:xfrm>
-            <a:off x="640080" y="2971800"/>
-            <a:ext cx="10911535" cy="1417320"/>
-          </a:xfrm>
-          <a:prstGeom prst="roundRect">
+            <a:off x="8158276" y="2194560"/>
+            <a:ext cx="3393338" cy="548640"/>
+          </a:xfrm>
+          <a:prstGeom prst="rect">
             <a:avLst/>
           </a:prstGeom>
           <a:solidFill>
-            <a:srgbClr val="FFFFFF"/>
+            <a:srgbClr val="C8A86B"/>
           </a:solidFill>
-          <a:ln w="22860">
-            <a:solidFill>
-              <a:srgbClr val="2E7D6B"/>
-            </a:solidFill>
+          <a:ln>
+            <a:noFill/>
           </a:ln>
           <a:effectLst/>
         </p:spPr>
@@ -7917,14 +9114,14 @@
       </p:sp>
       <p:sp>
         <p:nvSpPr>
-          <p:cNvPr id="9" name="TextBox 8"/>
+          <p:cNvPr id="16" name="TextBox 15"/>
           <p:cNvSpPr txBox="1"/>
           <p:nvPr/>
         </p:nvSpPr>
         <p:spPr>
           <a:xfrm>
-            <a:off x="1371600" y="3081528"/>
-            <a:ext cx="9997135" cy="457200"/>
+            <a:off x="8158276" y="2304288"/>
+            <a:ext cx="3393338" cy="365760"/>
           </a:xfrm>
           <a:prstGeom prst="rect">
             <a:avLst/>
@@ -7937,35 +9134,31 @@
           </a:bodyPr>
           <a:lstStyle/>
           <a:p>
-            <a:pPr algn="l">
-              <a:lnSpc>
-                <a:spcPct val="110000"/>
-              </a:lnSpc>
-            </a:pPr>
+            <a:pPr algn="ctr"/>
             <a:r>
               <a:rPr sz="1600" b="1">
                 <a:solidFill>
-                  <a:srgbClr val="1C2A33"/>
+                  <a:srgbClr val="FFFFFF"/>
                 </a:solidFill>
                 <a:latin typeface="微软雅黑"/>
                 <a:ea typeface="微软雅黑"/>
                 <a:cs typeface="微软雅黑"/>
               </a:rPr>
-              <a:t/>
-            </a:r>
-          </a:p>
-        </p:txBody>
-      </p:sp>
-      <p:sp>
-        <p:nvSpPr>
-          <p:cNvPr id="10" name="TextBox 9"/>
+              <a:t>拓展 · 衔接</a:t>
+            </a:r>
+          </a:p>
+        </p:txBody>
+      </p:sp>
+      <p:sp>
+        <p:nvSpPr>
+          <p:cNvPr id="17" name="TextBox 16"/>
           <p:cNvSpPr txBox="1"/>
           <p:nvPr/>
         </p:nvSpPr>
         <p:spPr>
           <a:xfrm>
-            <a:off x="1371600" y="3520440"/>
-            <a:ext cx="9997135" cy="777240"/>
+            <a:off x="8432596" y="2971800"/>
+            <a:ext cx="2844698" cy="2651760"/>
           </a:xfrm>
           <a:prstGeom prst="rect">
             <a:avLst/>
@@ -7980,11 +9173,11 @@
           <a:p>
             <a:pPr algn="l">
               <a:lnSpc>
-                <a:spcPct val="128000"/>
+                <a:spcPct val="155000"/>
               </a:lnSpc>
             </a:pPr>
             <a:r>
-              <a:rPr sz="1200" b="0">
+              <a:rPr sz="1350" b="0">
                 <a:solidFill>
                   <a:srgbClr val="1C2A33"/>
                 </a:solidFill>
@@ -7992,14 +9185,14 @@
                 <a:ea typeface="楷体"/>
                 <a:cs typeface="楷体"/>
               </a:rPr>
-              <a:t>【提高作业】写160字「我眼里的清静悲凉」，要求：①仿五幅式选身边一景；②用一情感词统摄；③贴细处描写。</a:t>
-            </a:r>
-          </a:p>
-        </p:txBody>
-      </p:sp>
-      <p:sp>
-        <p:nvSpPr>
-          <p:cNvPr id="11" name="TextBox 10"/>
+              <a:t>拓展·衔接：下节课《荷塘月色》同是写景抒情——比较两文「景与情」怎么贴合。</a:t>
+            </a:r>
+          </a:p>
+        </p:txBody>
+      </p:sp>
+      <p:sp>
+        <p:nvSpPr>
+          <p:cNvPr id="18" name="TextBox 17"/>
           <p:cNvSpPr txBox="1"/>
           <p:nvPr/>
         </p:nvSpPr>
@@ -8126,13 +9319,13 @@
             <a:r>
               <a:rPr sz="1300" b="1">
                 <a:solidFill>
-                  <a:srgbClr val="C8A86B"/>
+                  <a:srgbClr val="B23A2A"/>
                 </a:solidFill>
                 <a:latin typeface="微软雅黑"/>
                 <a:ea typeface="微软雅黑"/>
                 <a:cs typeface="微软雅黑"/>
               </a:rPr>
-              <a:t>本课小结</a:t>
+              <a:t>单元小结</a:t>
             </a:r>
           </a:p>
         </p:txBody>
@@ -8147,6 +9340,131 @@
           <a:xfrm>
             <a:off x="640080" y="1097280"/>
             <a:ext cx="822960" cy="30480"/>
+          </a:xfrm>
+          <a:prstGeom prst="rect">
+            <a:avLst/>
+          </a:prstGeom>
+          <a:solidFill>
+            <a:srgbClr val="B23A2A"/>
+          </a:solidFill>
+          <a:ln>
+            <a:noFill/>
+          </a:ln>
+          <a:effectLst/>
+        </p:spPr>
+        <p:style>
+          <a:lnRef idx="1">
+            <a:schemeClr val="accent1"/>
+          </a:lnRef>
+          <a:fillRef idx="3">
+            <a:schemeClr val="accent1"/>
+          </a:fillRef>
+          <a:effectRef idx="2">
+            <a:schemeClr val="accent1"/>
+          </a:effectRef>
+          <a:fontRef idx="minor">
+            <a:schemeClr val="lt1"/>
+          </a:fontRef>
+        </p:style>
+        <p:txBody>
+          <a:bodyPr rtlCol="0" anchor="ctr"/>
+          <a:lstStyle/>
+          <a:p>
+            <a:pPr algn="ctr"/>
+          </a:p>
+        </p:txBody>
+      </p:sp>
+      <p:sp>
+        <p:nvSpPr>
+          <p:cNvPr id="5" name="TextBox 4"/>
+          <p:cNvSpPr txBox="1"/>
+          <p:nvPr/>
+        </p:nvSpPr>
+        <p:spPr>
+          <a:xfrm>
+            <a:off x="640080" y="1280160"/>
+            <a:ext cx="10515600" cy="548640"/>
+          </a:xfrm>
+          <a:prstGeom prst="rect">
+            <a:avLst/>
+          </a:prstGeom>
+          <a:noFill/>
+        </p:spPr>
+        <p:txBody>
+          <a:bodyPr wrap="square" anchor="t" lIns="0" rIns="0" tIns="0" bIns="0">
+            <a:spAutoFit/>
+          </a:bodyPr>
+          <a:lstStyle/>
+          <a:p>
+            <a:pPr algn="l"/>
+            <a:r>
+              <a:rPr sz="2800" b="1">
+                <a:solidFill>
+                  <a:srgbClr val="1C2A33"/>
+                </a:solidFill>
+                <a:latin typeface="楷体"/>
+                <a:ea typeface="楷体"/>
+                <a:cs typeface="楷体"/>
+              </a:rPr>
+              <a:t>单元小结与反思</a:t>
+            </a:r>
+          </a:p>
+        </p:txBody>
+      </p:sp>
+      <p:sp>
+        <p:nvSpPr>
+          <p:cNvPr id="6" name="Rectangle 5"/>
+          <p:cNvSpPr/>
+          <p:nvPr/>
+        </p:nvSpPr>
+        <p:spPr>
+          <a:xfrm>
+            <a:off x="640080" y="2057400"/>
+            <a:ext cx="10911535" cy="4297680"/>
+          </a:xfrm>
+          <a:prstGeom prst="rect">
+            <a:avLst/>
+          </a:prstGeom>
+          <a:solidFill>
+            <a:srgbClr val="1C2A33"/>
+          </a:solidFill>
+          <a:ln>
+            <a:noFill/>
+          </a:ln>
+          <a:effectLst/>
+        </p:spPr>
+        <p:style>
+          <a:lnRef idx="1">
+            <a:schemeClr val="accent1"/>
+          </a:lnRef>
+          <a:fillRef idx="3">
+            <a:schemeClr val="accent1"/>
+          </a:fillRef>
+          <a:effectRef idx="2">
+            <a:schemeClr val="accent1"/>
+          </a:effectRef>
+          <a:fontRef idx="minor">
+            <a:schemeClr val="lt1"/>
+          </a:fontRef>
+        </p:style>
+        <p:txBody>
+          <a:bodyPr rtlCol="0" anchor="ctr"/>
+          <a:lstStyle/>
+          <a:p>
+            <a:pPr algn="ctr"/>
+          </a:p>
+        </p:txBody>
+      </p:sp>
+      <p:sp>
+        <p:nvSpPr>
+          <p:cNvPr id="7" name="Rectangle 6"/>
+          <p:cNvSpPr/>
+          <p:nvPr/>
+        </p:nvSpPr>
+        <p:spPr>
+          <a:xfrm>
+            <a:off x="960120" y="2331720"/>
+            <a:ext cx="54864" cy="381000"/>
           </a:xfrm>
           <a:prstGeom prst="rect">
             <a:avLst/>
@@ -8183,58 +9501,14 @@
       </p:sp>
       <p:sp>
         <p:nvSpPr>
-          <p:cNvPr id="5" name="Rectangle 4"/>
-          <p:cNvSpPr/>
-          <p:nvPr/>
-        </p:nvSpPr>
-        <p:spPr>
-          <a:xfrm>
-            <a:off x="640080" y="1737360"/>
-            <a:ext cx="54864" cy="431800"/>
-          </a:xfrm>
-          <a:prstGeom prst="rect">
-            <a:avLst/>
-          </a:prstGeom>
-          <a:solidFill>
-            <a:srgbClr val="C8A86B"/>
-          </a:solidFill>
-          <a:ln>
-            <a:noFill/>
-          </a:ln>
-          <a:effectLst/>
-        </p:spPr>
-        <p:style>
-          <a:lnRef idx="1">
-            <a:schemeClr val="accent1"/>
-          </a:lnRef>
-          <a:fillRef idx="3">
-            <a:schemeClr val="accent1"/>
-          </a:fillRef>
-          <a:effectRef idx="2">
-            <a:schemeClr val="accent1"/>
-          </a:effectRef>
-          <a:fontRef idx="minor">
-            <a:schemeClr val="lt1"/>
-          </a:fontRef>
-        </p:style>
-        <p:txBody>
-          <a:bodyPr rtlCol="0" anchor="ctr"/>
-          <a:lstStyle/>
-          <a:p>
-            <a:pPr algn="ctr"/>
-          </a:p>
-        </p:txBody>
-      </p:sp>
-      <p:sp>
-        <p:nvSpPr>
-          <p:cNvPr id="6" name="TextBox 5"/>
+          <p:cNvPr id="8" name="TextBox 7"/>
           <p:cNvSpPr txBox="1"/>
           <p:nvPr/>
         </p:nvSpPr>
         <p:spPr>
           <a:xfrm>
-            <a:off x="868680" y="1645920"/>
-            <a:ext cx="10682935" cy="2194560"/>
+            <a:off x="1188720" y="2286000"/>
+            <a:ext cx="9997135" cy="548640"/>
           </a:xfrm>
           <a:prstGeom prst="rect">
             <a:avLst/>
@@ -8247,45 +9521,128 @@
           </a:bodyPr>
           <a:lstStyle/>
           <a:p>
-            <a:pPr algn="l">
-              <a:lnSpc>
-                <a:spcPct val="150000"/>
-              </a:lnSpc>
-              <a:spcAft>
-                <a:spcPts val="1000"/>
-              </a:spcAft>
-            </a:pPr>
-            <a:r>
-              <a:rPr sz="2200" b="0">
-                <a:solidFill>
-                  <a:srgbClr val="1C2A33"/>
+            <a:pPr algn="l"/>
+            <a:r>
+              <a:rPr sz="1700" b="1">
+                <a:solidFill>
+                  <a:srgbClr val="C8A86B"/>
                 </a:solidFill>
                 <a:latin typeface="楷体"/>
                 <a:ea typeface="楷体"/>
                 <a:cs typeface="楷体"/>
               </a:rPr>
-              <a:t>本单元主题：自然情怀。把今天学到的方法带进下一篇——自己读、自己想、自己写。</a:t>
-            </a:r>
-          </a:p>
-          <a:p>
-            <a:pPr algn="l"/>
-            <a:r>
-              <a:rPr sz="1600" b="1">
-                <a:solidFill>
-                  <a:srgbClr val="B23A2A"/>
+              <a:t>第七单元 · 自然情怀 · 收束引导</a:t>
+            </a:r>
+          </a:p>
+        </p:txBody>
+      </p:sp>
+      <p:sp>
+        <p:nvSpPr>
+          <p:cNvPr id="9" name="TextBox 8"/>
+          <p:cNvSpPr txBox="1"/>
+          <p:nvPr/>
+        </p:nvSpPr>
+        <p:spPr>
+          <a:xfrm>
+            <a:off x="1188720" y="2926080"/>
+            <a:ext cx="9814255" cy="3291840"/>
+          </a:xfrm>
+          <a:prstGeom prst="rect">
+            <a:avLst/>
+          </a:prstGeom>
+          <a:noFill/>
+        </p:spPr>
+        <p:txBody>
+          <a:bodyPr wrap="square" anchor="t" lIns="0" rIns="0" tIns="0" bIns="0">
+            <a:spAutoFit/>
+          </a:bodyPr>
+          <a:lstStyle/>
+          <a:p>
+            <a:pPr algn="l">
+              <a:lnSpc>
+                <a:spcPct val="155000"/>
+              </a:lnSpc>
+              <a:spcAft>
+                <a:spcPts val="900"/>
+              </a:spcAft>
+            </a:pPr>
+            <a:r>
+              <a:rPr sz="1400" b="0">
+                <a:solidFill>
+                  <a:srgbClr val="FFFFFF"/>
+                </a:solidFill>
+                <a:latin typeface="楷体"/>
+                <a:ea typeface="楷体"/>
+                <a:cs typeface="楷体"/>
+              </a:rPr>
+              <a:t>第七单元讲「自然情怀」。《故都的秋》教我们读散文：先抓文眼「清静悲凉」。</a:t>
+            </a:r>
+          </a:p>
+          <a:p>
+            <a:pPr algn="l">
+              <a:lnSpc>
+                <a:spcPct val="155000"/>
+              </a:lnSpc>
+              <a:spcAft>
+                <a:spcPts val="900"/>
+              </a:spcAft>
+            </a:pPr>
+            <a:r>
+              <a:rPr sz="1400" b="0">
+                <a:solidFill>
+                  <a:srgbClr val="FFFFFF"/>
+                </a:solidFill>
+                <a:latin typeface="楷体"/>
+                <a:ea typeface="楷体"/>
+                <a:cs typeface="楷体"/>
+              </a:rPr>
+              <a:t>五幅寻常小景，神却都聚在悲凉——这叫形散神聚。</a:t>
+            </a:r>
+          </a:p>
+          <a:p>
+            <a:pPr algn="l">
+              <a:lnSpc>
+                <a:spcPct val="155000"/>
+              </a:lnSpc>
+              <a:spcAft>
+                <a:spcPts val="900"/>
+              </a:spcAft>
+            </a:pPr>
+            <a:r>
+              <a:rPr sz="1400" b="0">
+                <a:solidFill>
+                  <a:srgbClr val="FFFFFF"/>
+                </a:solidFill>
+                <a:latin typeface="楷体"/>
+                <a:ea typeface="楷体"/>
+                <a:cs typeface="楷体"/>
+              </a:rPr>
+              <a:t>回头看身边：有没有一处风景，也藏着你的某种心情？下一课，去朱自清的荷塘。</a:t>
+            </a:r>
+          </a:p>
+          <a:p>
+            <a:pPr algn="l">
+              <a:spcBef>
+                <a:spcPts val="800"/>
+              </a:spcBef>
+            </a:pPr>
+            <a:r>
+              <a:rPr sz="1100" b="0">
+                <a:solidFill>
+                  <a:srgbClr val="E7DFD2"/>
                 </a:solidFill>
                 <a:latin typeface="微软雅黑"/>
                 <a:ea typeface="微软雅黑"/>
                 <a:cs typeface="微软雅黑"/>
               </a:rPr>
-              <a:t>方法迁移：圈关键信息 → 理事件脉络 → 析人物精神</a:t>
-            </a:r>
-          </a:p>
-        </p:txBody>
-      </p:sp>
-      <p:sp>
-        <p:nvSpPr>
-          <p:cNvPr id="7" name="TextBox 6"/>
+              <a:t>本课件未使用无关配图 · 学科色块设计</a:t>
+            </a:r>
+          </a:p>
+        </p:txBody>
+      </p:sp>
+      <p:sp>
+        <p:nvSpPr>
+          <p:cNvPr id="10" name="TextBox 9"/>
           <p:cNvSpPr txBox="1"/>
           <p:nvPr/>
         </p:nvSpPr>
